--- a/entregas-agosto26/material-cliente-agosto26.pptx
+++ b/entregas-agosto26/material-cliente-agosto26.pptx
@@ -4225,9 +4225,9 @@
                 <a:solidFill>
                   <a:srgbClr val="DAFF94"/>
                 </a:solidFill>
-                <a:latin typeface="Cambria" pitchFamily="34" charset="0"/>
-                <a:ea typeface="Cambria" pitchFamily="34" charset="-122"/>
-                <a:cs typeface="Cambria" pitchFamily="34" charset="-120"/>
+                <a:latin typeface="Libre Baskerville" pitchFamily="34" charset="0"/>
+                <a:ea typeface="Libre Baskerville" pitchFamily="34" charset="-122"/>
+                <a:cs typeface="Libre Baskerville" pitchFamily="34" charset="-120"/>
               </a:rPr>
               <a:t>resumo do mês, feito pra você</a:t>
             </a:r>
@@ -4264,9 +4264,9 @@
                 <a:solidFill>
                   <a:srgbClr val="888888"/>
                 </a:solidFill>
-                <a:latin typeface="Courier New" pitchFamily="34" charset="0"/>
-                <a:ea typeface="Courier New" pitchFamily="34" charset="-122"/>
-                <a:cs typeface="Courier New" pitchFamily="34" charset="-120"/>
+                <a:latin typeface="JetBrains Mono" pitchFamily="34" charset="0"/>
+                <a:ea typeface="JetBrains Mono" pitchFamily="34" charset="-122"/>
+                <a:cs typeface="JetBrains Mono" pitchFamily="34" charset="-120"/>
               </a:rPr>
               <a:t>agosto_26</a:t>
             </a:r>
@@ -6699,9 +6699,9 @@
                 <a:solidFill>
                   <a:srgbClr val="DAFF94"/>
                 </a:solidFill>
-                <a:latin typeface="Cambria" pitchFamily="34" charset="0"/>
-                <a:ea typeface="Cambria" pitchFamily="34" charset="-122"/>
-                <a:cs typeface="Cambria" pitchFamily="34" charset="-120"/>
+                <a:latin typeface="Libre Baskerville" pitchFamily="34" charset="0"/>
+                <a:ea typeface="Libre Baskerville" pitchFamily="34" charset="-122"/>
+                <a:cs typeface="Libre Baskerville" pitchFamily="34" charset="-120"/>
               </a:rPr>
               <a:t>até o mês que vem.</a:t>
             </a:r>
@@ -6770,9 +6770,9 @@
                 <a:solidFill>
                   <a:srgbClr val="000000"/>
                 </a:solidFill>
-                <a:latin typeface="Courier New" pitchFamily="34" charset="0"/>
-                <a:ea typeface="Courier New" pitchFamily="34" charset="-122"/>
-                <a:cs typeface="Courier New" pitchFamily="34" charset="-120"/>
+                <a:latin typeface="JetBrains Mono" pitchFamily="34" charset="0"/>
+                <a:ea typeface="JetBrains Mono" pitchFamily="34" charset="-122"/>
+                <a:cs typeface="JetBrains Mono" pitchFamily="34" charset="-120"/>
               </a:rPr>
               <a:t>report↗</a:t>
             </a:r>
@@ -6809,9 +6809,9 @@
                 <a:solidFill>
                   <a:srgbClr val="000000"/>
                 </a:solidFill>
-                <a:latin typeface="Cambria" pitchFamily="34" charset="0"/>
-                <a:ea typeface="Cambria" pitchFamily="34" charset="-122"/>
-                <a:cs typeface="Cambria" pitchFamily="34" charset="-120"/>
+                <a:latin typeface="Libre Baskerville" pitchFamily="34" charset="0"/>
+                <a:ea typeface="Libre Baskerville" pitchFamily="34" charset="-122"/>
+                <a:cs typeface="Libre Baskerville" pitchFamily="34" charset="-120"/>
               </a:rPr>
               <a:t>arpejo</a:t>
             </a:r>
@@ -6848,9 +6848,9 @@
                 <a:solidFill>
                   <a:srgbClr val="000000"/>
                 </a:solidFill>
-                <a:latin typeface="Courier New" pitchFamily="34" charset="0"/>
-                <a:ea typeface="Courier New" pitchFamily="34" charset="-122"/>
-                <a:cs typeface="Courier New" pitchFamily="34" charset="-120"/>
+                <a:latin typeface="JetBrains Mono" pitchFamily="34" charset="0"/>
+                <a:ea typeface="JetBrains Mono" pitchFamily="34" charset="-122"/>
+                <a:cs typeface="JetBrains Mono" pitchFamily="34" charset="-120"/>
               </a:rPr>
               <a:t>agosto_26</a:t>
             </a:r>
@@ -6887,9 +6887,9 @@
                 <a:solidFill>
                   <a:srgbClr val="000000"/>
                 </a:solidFill>
-                <a:latin typeface="Cambria" pitchFamily="34" charset="0"/>
-                <a:ea typeface="Cambria" pitchFamily="34" charset="-122"/>
-                <a:cs typeface="Cambria" pitchFamily="34" charset="-120"/>
+                <a:latin typeface="Libre Baskerville" pitchFamily="34" charset="0"/>
+                <a:ea typeface="Libre Baskerville" pitchFamily="34" charset="-122"/>
+                <a:cs typeface="Libre Baskerville" pitchFamily="34" charset="-120"/>
               </a:rPr>
               <a:t>NEWS</a:t>
             </a:r>
@@ -6970,9 +6970,9 @@
                 <a:solidFill>
                   <a:srgbClr val="DAFF94"/>
                 </a:solidFill>
-                <a:latin typeface="Cambria" pitchFamily="34" charset="0"/>
-                <a:ea typeface="Cambria" pitchFamily="34" charset="-122"/>
-                <a:cs typeface="Cambria" pitchFamily="34" charset="-120"/>
+                <a:latin typeface="Libre Baskerville" pitchFamily="34" charset="0"/>
+                <a:ea typeface="Libre Baskerville" pitchFamily="34" charset="-122"/>
+                <a:cs typeface="Libre Baskerville" pitchFamily="34" charset="-120"/>
               </a:rPr>
               <a:t>Reddit</a:t>
             </a:r>
@@ -7092,9 +7092,9 @@
                 <a:solidFill>
                   <a:srgbClr val="DAFF94"/>
                 </a:solidFill>
-                <a:latin typeface="Cambria" pitchFamily="34" charset="0"/>
-                <a:ea typeface="Cambria" pitchFamily="34" charset="-122"/>
-                <a:cs typeface="Cambria" pitchFamily="34" charset="-120"/>
+                <a:latin typeface="Libre Baskerville" pitchFamily="34" charset="0"/>
+                <a:ea typeface="Libre Baskerville" pitchFamily="34" charset="-122"/>
+                <a:cs typeface="Libre Baskerville" pitchFamily="34" charset="-120"/>
               </a:rPr>
               <a:t>IA</a:t>
             </a:r>
@@ -7214,9 +7214,9 @@
                 <a:solidFill>
                   <a:srgbClr val="DAFF94"/>
                 </a:solidFill>
-                <a:latin typeface="Cambria" pitchFamily="34" charset="0"/>
-                <a:ea typeface="Cambria" pitchFamily="34" charset="-122"/>
-                <a:cs typeface="Cambria" pitchFamily="34" charset="-120"/>
+                <a:latin typeface="Libre Baskerville" pitchFamily="34" charset="0"/>
+                <a:ea typeface="Libre Baskerville" pitchFamily="34" charset="-122"/>
+                <a:cs typeface="Libre Baskerville" pitchFamily="34" charset="-120"/>
               </a:rPr>
               <a:t>WhatsApp</a:t>
             </a:r>
@@ -7363,9 +7363,9 @@
                 <a:solidFill>
                   <a:srgbClr val="DAFF94"/>
                 </a:solidFill>
-                <a:latin typeface="Courier New" pitchFamily="34" charset="0"/>
-                <a:ea typeface="Courier New" pitchFamily="34" charset="-122"/>
-                <a:cs typeface="Courier New" pitchFamily="34" charset="-120"/>
+                <a:latin typeface="JetBrains Mono" pitchFamily="34" charset="0"/>
+                <a:ea typeface="JetBrains Mono" pitchFamily="34" charset="-122"/>
+                <a:cs typeface="JetBrains Mono" pitchFamily="34" charset="-120"/>
               </a:rPr>
               <a:t>TRENDS</a:t>
             </a:r>
@@ -7373,9 +7373,32 @@
           </a:p>
         </p:txBody>
       </p:sp>
-      <p:sp>
-        <p:nvSpPr>
-          <p:cNvPr id="3" name="Shape 1"/>
+      <p:pic>
+        <p:nvPicPr>
+          <p:cNvPr id="3" name="Image 0" descr="/tmp/claude-0/-home-user-data-manipulation-exercises/f19acac8-ccb4-5197-8e49-c3b6029ad477/scratchpad/report-images/final/trend-hiper-realidade.jpg">    </p:cNvPr>
+          <p:cNvPicPr>
+            <a:picLocks noChangeAspect="1"/>
+          </p:cNvPicPr>
+          <p:nvPr/>
+        </p:nvPicPr>
+        <p:blipFill>
+          <a:blip r:embed="rId1"/>
+          <a:srcRect l="0" r="0" t="0" b="0"/>
+          <a:stretch/>
+        </p:blipFill>
+        <p:spPr>
+          <a:xfrm>
+            <a:off x="548640" y="1188720"/>
+            <a:ext cx="5364328" cy="5120640"/>
+          </a:xfrm>
+          <a:prstGeom prst="rect">
+            <a:avLst/>
+          </a:prstGeom>
+        </p:spPr>
+      </p:pic>
+      <p:sp>
+        <p:nvSpPr>
+          <p:cNvPr id="4" name="Shape 1"/>
           <p:cNvSpPr/>
           <p:nvPr/>
         </p:nvSpPr>
@@ -7389,22 +7412,46 @@
               <a:gd name="adj" fmla="val 2679"/>
             </a:avLst>
           </a:prstGeom>
+          <a:ln w="12700">
+            <a:solidFill>
+              <a:srgbClr val="000000"/>
+            </a:solidFill>
+            <a:prstDash val="solid"/>
+          </a:ln>
+        </p:spPr>
+      </p:sp>
+      <p:sp>
+        <p:nvSpPr>
+          <p:cNvPr id="5" name="Shape 2"/>
+          <p:cNvSpPr/>
+          <p:nvPr/>
+        </p:nvSpPr>
+        <p:spPr>
+          <a:xfrm>
+            <a:off x="548640" y="3339389"/>
+            <a:ext cx="5364328" cy="2969971"/>
+          </a:xfrm>
+          <a:prstGeom prst="rect">
+            <a:avLst/>
+          </a:prstGeom>
           <a:solidFill>
-            <a:srgbClr val="DAFF94"/>
+            <a:srgbClr val="000000">
+              <a:alpha val="70000"/>
+            </a:srgbClr>
           </a:solidFill>
           <a:ln/>
         </p:spPr>
       </p:sp>
       <p:sp>
         <p:nvSpPr>
-          <p:cNvPr id="4" name="Text 2"/>
-          <p:cNvSpPr/>
-          <p:nvPr/>
-        </p:nvSpPr>
-        <p:spPr>
-          <a:xfrm>
-            <a:off x="822960" y="1417320"/>
-            <a:ext cx="4815688" cy="822960"/>
+          <p:cNvPr id="6" name="Text 3"/>
+          <p:cNvSpPr/>
+          <p:nvPr/>
+        </p:nvSpPr>
+        <p:spPr>
+          <a:xfrm>
+            <a:off x="822960" y="3522269"/>
+            <a:ext cx="4815688" cy="411480"/>
           </a:xfrm>
           <a:prstGeom prst="rect">
             <a:avLst/>
@@ -7420,30 +7467,30 @@
               <a:buNone/>
             </a:pPr>
             <a:r>
-              <a:rPr lang="en-US" sz="1900" b="1" i="1" dirty="0">
-                <a:solidFill>
-                  <a:srgbClr val="000000"/>
-                </a:solidFill>
-                <a:latin typeface="Cambria" pitchFamily="34" charset="0"/>
-                <a:ea typeface="Cambria" pitchFamily="34" charset="-122"/>
-                <a:cs typeface="Cambria" pitchFamily="34" charset="-120"/>
+              <a:rPr lang="en-US" sz="1700" b="1" i="1" dirty="0">
+                <a:solidFill>
+                  <a:srgbClr val="DAFF94"/>
+                </a:solidFill>
+                <a:latin typeface="Libre Baskerville" pitchFamily="34" charset="0"/>
+                <a:ea typeface="Libre Baskerville" pitchFamily="34" charset="-122"/>
+                <a:cs typeface="Libre Baskerville" pitchFamily="34" charset="-120"/>
               </a:rPr>
               <a:t>HIPER-REALIDADE</a:t>
             </a:r>
-            <a:endParaRPr lang="en-US" sz="1900" dirty="0"/>
-          </a:p>
-        </p:txBody>
-      </p:sp>
-      <p:sp>
-        <p:nvSpPr>
-          <p:cNvPr id="5" name="Text 3"/>
-          <p:cNvSpPr/>
-          <p:nvPr/>
-        </p:nvSpPr>
-        <p:spPr>
-          <a:xfrm>
-            <a:off x="822960" y="2377440"/>
-            <a:ext cx="4815688" cy="548640"/>
+            <a:endParaRPr lang="en-US" sz="1700" dirty="0"/>
+          </a:p>
+        </p:txBody>
+      </p:sp>
+      <p:sp>
+        <p:nvSpPr>
+          <p:cNvPr id="7" name="Text 4"/>
+          <p:cNvSpPr/>
+          <p:nvPr/>
+        </p:nvSpPr>
+        <p:spPr>
+          <a:xfrm>
+            <a:off x="822960" y="3933749"/>
+            <a:ext cx="4815688" cy="320040"/>
           </a:xfrm>
           <a:prstGeom prst="rect">
             <a:avLst/>
@@ -7459,30 +7506,30 @@
               <a:buNone/>
             </a:pPr>
             <a:r>
-              <a:rPr lang="en-US" sz="1200" i="1" dirty="0">
-                <a:solidFill>
-                  <a:srgbClr val="222222"/>
-                </a:solidFill>
-                <a:latin typeface="Cambria" pitchFamily="34" charset="0"/>
-                <a:ea typeface="Cambria" pitchFamily="34" charset="-122"/>
-                <a:cs typeface="Cambria" pitchFamily="34" charset="-120"/>
+              <a:rPr lang="en-US" sz="1050" i="1" dirty="0">
+                <a:solidFill>
+                  <a:srgbClr val="FFFFFF"/>
+                </a:solidFill>
+                <a:latin typeface="Libre Baskerville" pitchFamily="34" charset="0"/>
+                <a:ea typeface="Libre Baskerville" pitchFamily="34" charset="-122"/>
+                <a:cs typeface="Libre Baskerville" pitchFamily="34" charset="-120"/>
               </a:rPr>
               <a:t>Online ou offline, o que conta é a experiência.</a:t>
             </a:r>
-            <a:endParaRPr lang="en-US" sz="1200" dirty="0"/>
-          </a:p>
-        </p:txBody>
-      </p:sp>
-      <p:sp>
-        <p:nvSpPr>
-          <p:cNvPr id="6" name="Text 4"/>
-          <p:cNvSpPr/>
-          <p:nvPr/>
-        </p:nvSpPr>
-        <p:spPr>
-          <a:xfrm>
-            <a:off x="822960" y="3063240"/>
-            <a:ext cx="4815688" cy="1371600"/>
+            <a:endParaRPr lang="en-US" sz="1050" dirty="0"/>
+          </a:p>
+        </p:txBody>
+      </p:sp>
+      <p:sp>
+        <p:nvSpPr>
+          <p:cNvPr id="8" name="Text 5"/>
+          <p:cNvSpPr/>
+          <p:nvPr/>
+        </p:nvSpPr>
+        <p:spPr>
+          <a:xfrm>
+            <a:off x="822960" y="4253789"/>
+            <a:ext cx="4815688" cy="777240"/>
           </a:xfrm>
           <a:prstGeom prst="rect">
             <a:avLst/>
@@ -7498,9 +7545,9 @@
               <a:buNone/>
             </a:pPr>
             <a:r>
-              <a:rPr lang="en-US" sz="1150" dirty="0">
-                <a:solidFill>
-                  <a:srgbClr val="222222"/>
+              <a:rPr lang="en-US" sz="1000" dirty="0">
+                <a:solidFill>
+                  <a:srgbClr val="FFFFFF"/>
                 </a:solidFill>
                 <a:latin typeface="Arial" pitchFamily="34" charset="0"/>
                 <a:ea typeface="Arial" pitchFamily="34" charset="-122"/>
@@ -7508,20 +7555,20 @@
               </a:rPr>
               <a:t>40% dos jovens da Geração Z afirmam que “é tudo real”, sem diferenciar experiências virtuais das físicas.</a:t>
             </a:r>
-            <a:endParaRPr lang="en-US" sz="1150" dirty="0"/>
-          </a:p>
-        </p:txBody>
-      </p:sp>
-      <p:sp>
-        <p:nvSpPr>
-          <p:cNvPr id="7" name="Text 5"/>
-          <p:cNvSpPr/>
-          <p:nvPr/>
-        </p:nvSpPr>
-        <p:spPr>
-          <a:xfrm>
-            <a:off x="822960" y="4617720"/>
-            <a:ext cx="4815688" cy="320040"/>
+            <a:endParaRPr lang="en-US" sz="1000" dirty="0"/>
+          </a:p>
+        </p:txBody>
+      </p:sp>
+      <p:sp>
+        <p:nvSpPr>
+          <p:cNvPr id="9" name="Text 6"/>
+          <p:cNvSpPr/>
+          <p:nvPr/>
+        </p:nvSpPr>
+        <p:spPr>
+          <a:xfrm>
+            <a:off x="822960" y="5031029"/>
+            <a:ext cx="4815688" cy="274320"/>
           </a:xfrm>
           <a:prstGeom prst="rect">
             <a:avLst/>
@@ -7537,9 +7584,9 @@
               <a:buNone/>
             </a:pPr>
             <a:r>
-              <a:rPr lang="en-US" sz="1150" b="1" dirty="0">
-                <a:solidFill>
-                  <a:srgbClr val="222222"/>
+              <a:rPr lang="en-US" sz="1000" b="1" dirty="0">
+                <a:solidFill>
+                  <a:srgbClr val="DAFF94"/>
                 </a:solidFill>
                 <a:latin typeface="Arial" pitchFamily="34" charset="0"/>
                 <a:ea typeface="Arial" pitchFamily="34" charset="-122"/>
@@ -7547,20 +7594,20 @@
               </a:rPr>
               <a:t>Para as marcas:</a:t>
             </a:r>
-            <a:endParaRPr lang="en-US" sz="1150" dirty="0"/>
-          </a:p>
-        </p:txBody>
-      </p:sp>
-      <p:sp>
-        <p:nvSpPr>
-          <p:cNvPr id="8" name="Text 6"/>
-          <p:cNvSpPr/>
-          <p:nvPr/>
-        </p:nvSpPr>
-        <p:spPr>
-          <a:xfrm>
-            <a:off x="822960" y="4983480"/>
-            <a:ext cx="4815688" cy="1234440"/>
+            <a:endParaRPr lang="en-US" sz="1000" dirty="0"/>
+          </a:p>
+        </p:txBody>
+      </p:sp>
+      <p:sp>
+        <p:nvSpPr>
+          <p:cNvPr id="10" name="Text 7"/>
+          <p:cNvSpPr/>
+          <p:nvPr/>
+        </p:nvSpPr>
+        <p:spPr>
+          <a:xfrm>
+            <a:off x="822960" y="5305349"/>
+            <a:ext cx="4815688" cy="777240"/>
           </a:xfrm>
           <a:prstGeom prst="rect">
             <a:avLst/>
@@ -7576,9 +7623,9 @@
               <a:buNone/>
             </a:pPr>
             <a:r>
-              <a:rPr lang="en-US" sz="1150" dirty="0">
-                <a:solidFill>
-                  <a:srgbClr val="222222"/>
+              <a:rPr lang="en-US" sz="1000" dirty="0">
+                <a:solidFill>
+                  <a:srgbClr val="FFFFFF"/>
                 </a:solidFill>
                 <a:latin typeface="Arial" pitchFamily="34" charset="0"/>
                 <a:ea typeface="Arial" pitchFamily="34" charset="-122"/>
@@ -7586,13 +7633,36 @@
               </a:rPr>
               <a:t>o que importa é a experiência que a marca proporciona, real ou gerada por IA.</a:t>
             </a:r>
-            <a:endParaRPr lang="en-US" sz="1150" dirty="0"/>
-          </a:p>
-        </p:txBody>
-      </p:sp>
-      <p:sp>
-        <p:nvSpPr>
-          <p:cNvPr id="9" name="Shape 7"/>
+            <a:endParaRPr lang="en-US" sz="1000" dirty="0"/>
+          </a:p>
+        </p:txBody>
+      </p:sp>
+      <p:pic>
+        <p:nvPicPr>
+          <p:cNvPr id="11" name="Image 1" descr="/tmp/claude-0/-home-user-data-manipulation-exercises/f19acac8-ccb4-5197-8e49-c3b6029ad477/scratchpad/report-images/final/trend-experiencias-transformadoras.jpg">    </p:cNvPr>
+          <p:cNvPicPr>
+            <a:picLocks noChangeAspect="1"/>
+          </p:cNvPicPr>
+          <p:nvPr/>
+        </p:nvPicPr>
+        <p:blipFill>
+          <a:blip r:embed="rId2"/>
+          <a:srcRect l="0" r="0" t="0" b="0"/>
+          <a:stretch/>
+        </p:blipFill>
+        <p:spPr>
+          <a:xfrm>
+            <a:off x="6278728" y="1188720"/>
+            <a:ext cx="5364328" cy="5120640"/>
+          </a:xfrm>
+          <a:prstGeom prst="rect">
+            <a:avLst/>
+          </a:prstGeom>
+        </p:spPr>
+      </p:pic>
+      <p:sp>
+        <p:nvSpPr>
+          <p:cNvPr id="12" name="Shape 8"/>
           <p:cNvSpPr/>
           <p:nvPr/>
         </p:nvSpPr>
@@ -7606,22 +7676,46 @@
               <a:gd name="adj" fmla="val 2679"/>
             </a:avLst>
           </a:prstGeom>
+          <a:ln w="12700">
+            <a:solidFill>
+              <a:srgbClr val="000000"/>
+            </a:solidFill>
+            <a:prstDash val="solid"/>
+          </a:ln>
+        </p:spPr>
+      </p:sp>
+      <p:sp>
+        <p:nvSpPr>
+          <p:cNvPr id="13" name="Shape 9"/>
+          <p:cNvSpPr/>
+          <p:nvPr/>
+        </p:nvSpPr>
+        <p:spPr>
+          <a:xfrm>
+            <a:off x="6278728" y="3339389"/>
+            <a:ext cx="5364328" cy="2969971"/>
+          </a:xfrm>
+          <a:prstGeom prst="rect">
+            <a:avLst/>
+          </a:prstGeom>
           <a:solidFill>
-            <a:srgbClr val="DAFF94"/>
+            <a:srgbClr val="000000">
+              <a:alpha val="70000"/>
+            </a:srgbClr>
           </a:solidFill>
           <a:ln/>
         </p:spPr>
       </p:sp>
       <p:sp>
         <p:nvSpPr>
-          <p:cNvPr id="10" name="Text 8"/>
-          <p:cNvSpPr/>
-          <p:nvPr/>
-        </p:nvSpPr>
-        <p:spPr>
-          <a:xfrm>
-            <a:off x="6553048" y="1417320"/>
-            <a:ext cx="4815688" cy="822960"/>
+          <p:cNvPr id="14" name="Text 10"/>
+          <p:cNvSpPr/>
+          <p:nvPr/>
+        </p:nvSpPr>
+        <p:spPr>
+          <a:xfrm>
+            <a:off x="6553048" y="3522269"/>
+            <a:ext cx="4815688" cy="411480"/>
           </a:xfrm>
           <a:prstGeom prst="rect">
             <a:avLst/>
@@ -7637,30 +7731,30 @@
               <a:buNone/>
             </a:pPr>
             <a:r>
-              <a:rPr lang="en-US" sz="1900" b="1" i="1" dirty="0">
-                <a:solidFill>
-                  <a:srgbClr val="000000"/>
-                </a:solidFill>
-                <a:latin typeface="Cambria" pitchFamily="34" charset="0"/>
-                <a:ea typeface="Cambria" pitchFamily="34" charset="-122"/>
-                <a:cs typeface="Cambria" pitchFamily="34" charset="-120"/>
+              <a:rPr lang="en-US" sz="1700" b="1" i="1" dirty="0">
+                <a:solidFill>
+                  <a:srgbClr val="DAFF94"/>
+                </a:solidFill>
+                <a:latin typeface="Libre Baskerville" pitchFamily="34" charset="0"/>
+                <a:ea typeface="Libre Baskerville" pitchFamily="34" charset="-122"/>
+                <a:cs typeface="Libre Baskerville" pitchFamily="34" charset="-120"/>
               </a:rPr>
               <a:t>EXPERIÊNCIAS TRANSFORMADORAS</a:t>
             </a:r>
-            <a:endParaRPr lang="en-US" sz="1900" dirty="0"/>
-          </a:p>
-        </p:txBody>
-      </p:sp>
-      <p:sp>
-        <p:nvSpPr>
-          <p:cNvPr id="11" name="Text 9"/>
-          <p:cNvSpPr/>
-          <p:nvPr/>
-        </p:nvSpPr>
-        <p:spPr>
-          <a:xfrm>
-            <a:off x="6553048" y="2377440"/>
-            <a:ext cx="4815688" cy="548640"/>
+            <a:endParaRPr lang="en-US" sz="1700" dirty="0"/>
+          </a:p>
+        </p:txBody>
+      </p:sp>
+      <p:sp>
+        <p:nvSpPr>
+          <p:cNvPr id="15" name="Text 11"/>
+          <p:cNvSpPr/>
+          <p:nvPr/>
+        </p:nvSpPr>
+        <p:spPr>
+          <a:xfrm>
+            <a:off x="6553048" y="3933749"/>
+            <a:ext cx="4815688" cy="320040"/>
           </a:xfrm>
           <a:prstGeom prst="rect">
             <a:avLst/>
@@ -7676,30 +7770,30 @@
               <a:buNone/>
             </a:pPr>
             <a:r>
-              <a:rPr lang="en-US" sz="1200" i="1" dirty="0">
-                <a:solidFill>
-                  <a:srgbClr val="222222"/>
-                </a:solidFill>
-                <a:latin typeface="Cambria" pitchFamily="34" charset="0"/>
-                <a:ea typeface="Cambria" pitchFamily="34" charset="-122"/>
-                <a:cs typeface="Cambria" pitchFamily="34" charset="-120"/>
+              <a:rPr lang="en-US" sz="1050" i="1" dirty="0">
+                <a:solidFill>
+                  <a:srgbClr val="FFFFFF"/>
+                </a:solidFill>
+                <a:latin typeface="Libre Baskerville" pitchFamily="34" charset="0"/>
+                <a:ea typeface="Libre Baskerville" pitchFamily="34" charset="-122"/>
+                <a:cs typeface="Libre Baskerville" pitchFamily="34" charset="-120"/>
               </a:rPr>
               <a:t>Catalisadoras de transformação pessoal.</a:t>
             </a:r>
-            <a:endParaRPr lang="en-US" sz="1200" dirty="0"/>
-          </a:p>
-        </p:txBody>
-      </p:sp>
-      <p:sp>
-        <p:nvSpPr>
-          <p:cNvPr id="12" name="Text 10"/>
-          <p:cNvSpPr/>
-          <p:nvPr/>
-        </p:nvSpPr>
-        <p:spPr>
-          <a:xfrm>
-            <a:off x="6553048" y="3063240"/>
-            <a:ext cx="4815688" cy="1371600"/>
+            <a:endParaRPr lang="en-US" sz="1050" dirty="0"/>
+          </a:p>
+        </p:txBody>
+      </p:sp>
+      <p:sp>
+        <p:nvSpPr>
+          <p:cNvPr id="16" name="Text 12"/>
+          <p:cNvSpPr/>
+          <p:nvPr/>
+        </p:nvSpPr>
+        <p:spPr>
+          <a:xfrm>
+            <a:off x="6553048" y="4253789"/>
+            <a:ext cx="4815688" cy="777240"/>
           </a:xfrm>
           <a:prstGeom prst="rect">
             <a:avLst/>
@@ -7715,9 +7809,9 @@
               <a:buNone/>
             </a:pPr>
             <a:r>
-              <a:rPr lang="en-US" sz="1150" dirty="0">
-                <a:solidFill>
-                  <a:srgbClr val="222222"/>
+              <a:rPr lang="en-US" sz="1000" dirty="0">
+                <a:solidFill>
+                  <a:srgbClr val="FFFFFF"/>
                 </a:solidFill>
                 <a:latin typeface="Arial" pitchFamily="34" charset="0"/>
                 <a:ea typeface="Arial" pitchFamily="34" charset="-122"/>
@@ -7725,20 +7819,20 @@
               </a:rPr>
               <a:t>88% das pessoas querem vivências significativas; 87% dizem que as melhores experiências são as que as transformam de alguma forma.</a:t>
             </a:r>
-            <a:endParaRPr lang="en-US" sz="1150" dirty="0"/>
-          </a:p>
-        </p:txBody>
-      </p:sp>
-      <p:sp>
-        <p:nvSpPr>
-          <p:cNvPr id="13" name="Text 11"/>
-          <p:cNvSpPr/>
-          <p:nvPr/>
-        </p:nvSpPr>
-        <p:spPr>
-          <a:xfrm>
-            <a:off x="6553048" y="4617720"/>
-            <a:ext cx="4815688" cy="320040"/>
+            <a:endParaRPr lang="en-US" sz="1000" dirty="0"/>
+          </a:p>
+        </p:txBody>
+      </p:sp>
+      <p:sp>
+        <p:nvSpPr>
+          <p:cNvPr id="17" name="Text 13"/>
+          <p:cNvSpPr/>
+          <p:nvPr/>
+        </p:nvSpPr>
+        <p:spPr>
+          <a:xfrm>
+            <a:off x="6553048" y="5031029"/>
+            <a:ext cx="4815688" cy="274320"/>
           </a:xfrm>
           <a:prstGeom prst="rect">
             <a:avLst/>
@@ -7754,9 +7848,9 @@
               <a:buNone/>
             </a:pPr>
             <a:r>
-              <a:rPr lang="en-US" sz="1150" b="1" dirty="0">
-                <a:solidFill>
-                  <a:srgbClr val="222222"/>
+              <a:rPr lang="en-US" sz="1000" b="1" dirty="0">
+                <a:solidFill>
+                  <a:srgbClr val="DAFF94"/>
                 </a:solidFill>
                 <a:latin typeface="Arial" pitchFamily="34" charset="0"/>
                 <a:ea typeface="Arial" pitchFamily="34" charset="-122"/>
@@ -7764,20 +7858,20 @@
               </a:rPr>
               <a:t>Para as marcas:</a:t>
             </a:r>
-            <a:endParaRPr lang="en-US" sz="1150" dirty="0"/>
-          </a:p>
-        </p:txBody>
-      </p:sp>
-      <p:sp>
-        <p:nvSpPr>
-          <p:cNvPr id="14" name="Text 12"/>
-          <p:cNvSpPr/>
-          <p:nvPr/>
-        </p:nvSpPr>
-        <p:spPr>
-          <a:xfrm>
-            <a:off x="6553048" y="4983480"/>
-            <a:ext cx="4815688" cy="1234440"/>
+            <a:endParaRPr lang="en-US" sz="1000" dirty="0"/>
+          </a:p>
+        </p:txBody>
+      </p:sp>
+      <p:sp>
+        <p:nvSpPr>
+          <p:cNvPr id="18" name="Text 14"/>
+          <p:cNvSpPr/>
+          <p:nvPr/>
+        </p:nvSpPr>
+        <p:spPr>
+          <a:xfrm>
+            <a:off x="6553048" y="5305349"/>
+            <a:ext cx="4815688" cy="777240"/>
           </a:xfrm>
           <a:prstGeom prst="rect">
             <a:avLst/>
@@ -7793,9 +7887,9 @@
               <a:buNone/>
             </a:pPr>
             <a:r>
-              <a:rPr lang="en-US" sz="1150" dirty="0">
-                <a:solidFill>
-                  <a:srgbClr val="222222"/>
+              <a:rPr lang="en-US" sz="1000" dirty="0">
+                <a:solidFill>
+                  <a:srgbClr val="FFFFFF"/>
                 </a:solidFill>
                 <a:latin typeface="Arial" pitchFamily="34" charset="0"/>
                 <a:ea typeface="Arial" pitchFamily="34" charset="-122"/>
@@ -7803,7 +7897,7 @@
               </a:rPr>
               <a:t>quanto mais a marca contribuir para a evolução pessoal do cliente, maior a fidelização.</a:t>
             </a:r>
-            <a:endParaRPr lang="en-US" sz="1150" dirty="0"/>
+            <a:endParaRPr lang="en-US" sz="1000" dirty="0"/>
           </a:p>
         </p:txBody>
       </p:sp>
@@ -7868,9 +7962,9 @@
                 <a:solidFill>
                   <a:srgbClr val="DAFF94"/>
                 </a:solidFill>
-                <a:latin typeface="Courier New" pitchFamily="34" charset="0"/>
-                <a:ea typeface="Courier New" pitchFamily="34" charset="-122"/>
-                <a:cs typeface="Courier New" pitchFamily="34" charset="-120"/>
+                <a:latin typeface="JetBrains Mono" pitchFamily="34" charset="0"/>
+                <a:ea typeface="JetBrains Mono" pitchFamily="34" charset="-122"/>
+                <a:cs typeface="JetBrains Mono" pitchFamily="34" charset="-120"/>
               </a:rPr>
               <a:t>TRENDS</a:t>
             </a:r>
@@ -7878,9 +7972,32 @@
           </a:p>
         </p:txBody>
       </p:sp>
-      <p:sp>
-        <p:nvSpPr>
-          <p:cNvPr id="3" name="Shape 1"/>
+      <p:pic>
+        <p:nvPicPr>
+          <p:cNvPr id="3" name="Image 0" descr="/tmp/claude-0/-home-user-data-manipulation-exercises/f19acac8-ccb4-5197-8e49-c3b6029ad477/scratchpad/report-images/final/trend-sport-fandom.jpg">    </p:cNvPr>
+          <p:cNvPicPr>
+            <a:picLocks noChangeAspect="1"/>
+          </p:cNvPicPr>
+          <p:nvPr/>
+        </p:nvPicPr>
+        <p:blipFill>
+          <a:blip r:embed="rId1"/>
+          <a:srcRect l="0" r="0" t="0" b="0"/>
+          <a:stretch/>
+        </p:blipFill>
+        <p:spPr>
+          <a:xfrm>
+            <a:off x="548640" y="1188720"/>
+            <a:ext cx="5364328" cy="5120640"/>
+          </a:xfrm>
+          <a:prstGeom prst="rect">
+            <a:avLst/>
+          </a:prstGeom>
+        </p:spPr>
+      </p:pic>
+      <p:sp>
+        <p:nvSpPr>
+          <p:cNvPr id="4" name="Shape 1"/>
           <p:cNvSpPr/>
           <p:nvPr/>
         </p:nvSpPr>
@@ -7894,22 +8011,46 @@
               <a:gd name="adj" fmla="val 2679"/>
             </a:avLst>
           </a:prstGeom>
+          <a:ln w="12700">
+            <a:solidFill>
+              <a:srgbClr val="000000"/>
+            </a:solidFill>
+            <a:prstDash val="solid"/>
+          </a:ln>
+        </p:spPr>
+      </p:sp>
+      <p:sp>
+        <p:nvSpPr>
+          <p:cNvPr id="5" name="Shape 2"/>
+          <p:cNvSpPr/>
+          <p:nvPr/>
+        </p:nvSpPr>
+        <p:spPr>
+          <a:xfrm>
+            <a:off x="548640" y="3339389"/>
+            <a:ext cx="5364328" cy="2969971"/>
+          </a:xfrm>
+          <a:prstGeom prst="rect">
+            <a:avLst/>
+          </a:prstGeom>
           <a:solidFill>
-            <a:srgbClr val="DAFF94"/>
+            <a:srgbClr val="000000">
+              <a:alpha val="70000"/>
+            </a:srgbClr>
           </a:solidFill>
           <a:ln/>
         </p:spPr>
       </p:sp>
       <p:sp>
         <p:nvSpPr>
-          <p:cNvPr id="4" name="Text 2"/>
-          <p:cNvSpPr/>
-          <p:nvPr/>
-        </p:nvSpPr>
-        <p:spPr>
-          <a:xfrm>
-            <a:off x="822960" y="1417320"/>
-            <a:ext cx="4815688" cy="822960"/>
+          <p:cNvPr id="6" name="Text 3"/>
+          <p:cNvSpPr/>
+          <p:nvPr/>
+        </p:nvSpPr>
+        <p:spPr>
+          <a:xfrm>
+            <a:off x="822960" y="3522269"/>
+            <a:ext cx="4815688" cy="411480"/>
           </a:xfrm>
           <a:prstGeom prst="rect">
             <a:avLst/>
@@ -7925,30 +8066,30 @@
               <a:buNone/>
             </a:pPr>
             <a:r>
-              <a:rPr lang="en-US" sz="1900" b="1" i="1" dirty="0">
-                <a:solidFill>
-                  <a:srgbClr val="000000"/>
-                </a:solidFill>
-                <a:latin typeface="Cambria" pitchFamily="34" charset="0"/>
-                <a:ea typeface="Cambria" pitchFamily="34" charset="-122"/>
-                <a:cs typeface="Cambria" pitchFamily="34" charset="-120"/>
+              <a:rPr lang="en-US" sz="1700" b="1" i="1" dirty="0">
+                <a:solidFill>
+                  <a:srgbClr val="DAFF94"/>
+                </a:solidFill>
+                <a:latin typeface="Libre Baskerville" pitchFamily="34" charset="0"/>
+                <a:ea typeface="Libre Baskerville" pitchFamily="34" charset="-122"/>
+                <a:cs typeface="Libre Baskerville" pitchFamily="34" charset="-120"/>
               </a:rPr>
               <a:t>NEW-WAVE SPORT FANDOM</a:t>
             </a:r>
-            <a:endParaRPr lang="en-US" sz="1900" dirty="0"/>
-          </a:p>
-        </p:txBody>
-      </p:sp>
-      <p:sp>
-        <p:nvSpPr>
-          <p:cNvPr id="5" name="Text 3"/>
-          <p:cNvSpPr/>
-          <p:nvPr/>
-        </p:nvSpPr>
-        <p:spPr>
-          <a:xfrm>
-            <a:off x="822960" y="2377440"/>
-            <a:ext cx="4815688" cy="548640"/>
+            <a:endParaRPr lang="en-US" sz="1700" dirty="0"/>
+          </a:p>
+        </p:txBody>
+      </p:sp>
+      <p:sp>
+        <p:nvSpPr>
+          <p:cNvPr id="7" name="Text 4"/>
+          <p:cNvSpPr/>
+          <p:nvPr/>
+        </p:nvSpPr>
+        <p:spPr>
+          <a:xfrm>
+            <a:off x="822960" y="3933749"/>
+            <a:ext cx="4815688" cy="320040"/>
           </a:xfrm>
           <a:prstGeom prst="rect">
             <a:avLst/>
@@ -7964,30 +8105,30 @@
               <a:buNone/>
             </a:pPr>
             <a:r>
-              <a:rPr lang="en-US" sz="1200" i="1" dirty="0">
-                <a:solidFill>
-                  <a:srgbClr val="222222"/>
-                </a:solidFill>
-                <a:latin typeface="Cambria" pitchFamily="34" charset="0"/>
-                <a:ea typeface="Cambria" pitchFamily="34" charset="-122"/>
-                <a:cs typeface="Cambria" pitchFamily="34" charset="-120"/>
+              <a:rPr lang="en-US" sz="1050" i="1" dirty="0">
+                <a:solidFill>
+                  <a:srgbClr val="FFFFFF"/>
+                </a:solidFill>
+                <a:latin typeface="Libre Baskerville" pitchFamily="34" charset="0"/>
+                <a:ea typeface="Libre Baskerville" pitchFamily="34" charset="-122"/>
+                <a:cs typeface="Libre Baskerville" pitchFamily="34" charset="-120"/>
               </a:rPr>
               <a:t>Uma nova geração de fãs redesenha o esporte.</a:t>
             </a:r>
-            <a:endParaRPr lang="en-US" sz="1200" dirty="0"/>
-          </a:p>
-        </p:txBody>
-      </p:sp>
-      <p:sp>
-        <p:nvSpPr>
-          <p:cNvPr id="6" name="Text 4"/>
-          <p:cNvSpPr/>
-          <p:nvPr/>
-        </p:nvSpPr>
-        <p:spPr>
-          <a:xfrm>
-            <a:off x="822960" y="3063240"/>
-            <a:ext cx="4815688" cy="1371600"/>
+            <a:endParaRPr lang="en-US" sz="1050" dirty="0"/>
+          </a:p>
+        </p:txBody>
+      </p:sp>
+      <p:sp>
+        <p:nvSpPr>
+          <p:cNvPr id="8" name="Text 5"/>
+          <p:cNvSpPr/>
+          <p:nvPr/>
+        </p:nvSpPr>
+        <p:spPr>
+          <a:xfrm>
+            <a:off x="822960" y="4253789"/>
+            <a:ext cx="4815688" cy="777240"/>
           </a:xfrm>
           <a:prstGeom prst="rect">
             <a:avLst/>
@@ -8003,9 +8144,9 @@
               <a:buNone/>
             </a:pPr>
             <a:r>
-              <a:rPr lang="en-US" sz="1150" dirty="0">
-                <a:solidFill>
-                  <a:srgbClr val="222222"/>
+              <a:rPr lang="en-US" sz="1000" dirty="0">
+                <a:solidFill>
+                  <a:srgbClr val="FFFFFF"/>
                 </a:solidFill>
                 <a:latin typeface="Arial" pitchFamily="34" charset="0"/>
                 <a:ea typeface="Arial" pitchFamily="34" charset="-122"/>
@@ -8013,20 +8154,20 @@
               </a:rPr>
               <a:t>3 em cada 4 novos fãs de Fórmula 1 são mulheres; o esporte vira território de moda, beleza e lifestyle.</a:t>
             </a:r>
-            <a:endParaRPr lang="en-US" sz="1150" dirty="0"/>
-          </a:p>
-        </p:txBody>
-      </p:sp>
-      <p:sp>
-        <p:nvSpPr>
-          <p:cNvPr id="7" name="Text 5"/>
-          <p:cNvSpPr/>
-          <p:nvPr/>
-        </p:nvSpPr>
-        <p:spPr>
-          <a:xfrm>
-            <a:off x="822960" y="4617720"/>
-            <a:ext cx="4815688" cy="320040"/>
+            <a:endParaRPr lang="en-US" sz="1000" dirty="0"/>
+          </a:p>
+        </p:txBody>
+      </p:sp>
+      <p:sp>
+        <p:nvSpPr>
+          <p:cNvPr id="9" name="Text 6"/>
+          <p:cNvSpPr/>
+          <p:nvPr/>
+        </p:nvSpPr>
+        <p:spPr>
+          <a:xfrm>
+            <a:off x="822960" y="5031029"/>
+            <a:ext cx="4815688" cy="274320"/>
           </a:xfrm>
           <a:prstGeom prst="rect">
             <a:avLst/>
@@ -8042,9 +8183,9 @@
               <a:buNone/>
             </a:pPr>
             <a:r>
-              <a:rPr lang="en-US" sz="1150" b="1" dirty="0">
-                <a:solidFill>
-                  <a:srgbClr val="222222"/>
+              <a:rPr lang="en-US" sz="1000" b="1" dirty="0">
+                <a:solidFill>
+                  <a:srgbClr val="DAFF94"/>
                 </a:solidFill>
                 <a:latin typeface="Arial" pitchFamily="34" charset="0"/>
                 <a:ea typeface="Arial" pitchFamily="34" charset="-122"/>
@@ -8052,20 +8193,20 @@
               </a:rPr>
               <a:t>Para as marcas:</a:t>
             </a:r>
-            <a:endParaRPr lang="en-US" sz="1150" dirty="0"/>
-          </a:p>
-        </p:txBody>
-      </p:sp>
-      <p:sp>
-        <p:nvSpPr>
-          <p:cNvPr id="8" name="Text 6"/>
-          <p:cNvSpPr/>
-          <p:nvPr/>
-        </p:nvSpPr>
-        <p:spPr>
-          <a:xfrm>
-            <a:off x="822960" y="4983480"/>
-            <a:ext cx="4815688" cy="1234440"/>
+            <a:endParaRPr lang="en-US" sz="1000" dirty="0"/>
+          </a:p>
+        </p:txBody>
+      </p:sp>
+      <p:sp>
+        <p:nvSpPr>
+          <p:cNvPr id="10" name="Text 7"/>
+          <p:cNvSpPr/>
+          <p:nvPr/>
+        </p:nvSpPr>
+        <p:spPr>
+          <a:xfrm>
+            <a:off x="822960" y="5305349"/>
+            <a:ext cx="4815688" cy="777240"/>
           </a:xfrm>
           <a:prstGeom prst="rect">
             <a:avLst/>
@@ -8081,9 +8222,9 @@
               <a:buNone/>
             </a:pPr>
             <a:r>
-              <a:rPr lang="en-US" sz="1150" dirty="0">
-                <a:solidFill>
-                  <a:srgbClr val="222222"/>
+              <a:rPr lang="en-US" sz="1000" dirty="0">
+                <a:solidFill>
+                  <a:srgbClr val="FFFFFF"/>
                 </a:solidFill>
                 <a:latin typeface="Arial" pitchFamily="34" charset="0"/>
                 <a:ea typeface="Arial" pitchFamily="34" charset="-122"/>
@@ -8091,13 +8232,36 @@
               </a:rPr>
               <a:t>esporte deixou de ser só competição — virou cultura, entretenimento e estilo de vida.</a:t>
             </a:r>
-            <a:endParaRPr lang="en-US" sz="1150" dirty="0"/>
-          </a:p>
-        </p:txBody>
-      </p:sp>
-      <p:sp>
-        <p:nvSpPr>
-          <p:cNvPr id="9" name="Shape 7"/>
+            <a:endParaRPr lang="en-US" sz="1000" dirty="0"/>
+          </a:p>
+        </p:txBody>
+      </p:sp>
+      <p:pic>
+        <p:nvPicPr>
+          <p:cNvPr id="11" name="Image 1" descr="/tmp/claude-0/-home-user-data-manipulation-exercises/f19acac8-ccb4-5197-8e49-c3b6029ad477/scratchpad/report-images/final/trend-sem-ressaca.jpg">    </p:cNvPr>
+          <p:cNvPicPr>
+            <a:picLocks noChangeAspect="1"/>
+          </p:cNvPicPr>
+          <p:nvPr/>
+        </p:nvPicPr>
+        <p:blipFill>
+          <a:blip r:embed="rId2"/>
+          <a:srcRect l="0" r="0" t="0" b="0"/>
+          <a:stretch/>
+        </p:blipFill>
+        <p:spPr>
+          <a:xfrm>
+            <a:off x="6278728" y="1188720"/>
+            <a:ext cx="5364328" cy="5120640"/>
+          </a:xfrm>
+          <a:prstGeom prst="rect">
+            <a:avLst/>
+          </a:prstGeom>
+        </p:spPr>
+      </p:pic>
+      <p:sp>
+        <p:nvSpPr>
+          <p:cNvPr id="12" name="Shape 8"/>
           <p:cNvSpPr/>
           <p:nvPr/>
         </p:nvSpPr>
@@ -8111,22 +8275,46 @@
               <a:gd name="adj" fmla="val 2679"/>
             </a:avLst>
           </a:prstGeom>
+          <a:ln w="12700">
+            <a:solidFill>
+              <a:srgbClr val="000000"/>
+            </a:solidFill>
+            <a:prstDash val="solid"/>
+          </a:ln>
+        </p:spPr>
+      </p:sp>
+      <p:sp>
+        <p:nvSpPr>
+          <p:cNvPr id="13" name="Shape 9"/>
+          <p:cNvSpPr/>
+          <p:nvPr/>
+        </p:nvSpPr>
+        <p:spPr>
+          <a:xfrm>
+            <a:off x="6278728" y="3339389"/>
+            <a:ext cx="5364328" cy="2969971"/>
+          </a:xfrm>
+          <a:prstGeom prst="rect">
+            <a:avLst/>
+          </a:prstGeom>
           <a:solidFill>
-            <a:srgbClr val="DAFF94"/>
+            <a:srgbClr val="000000">
+              <a:alpha val="70000"/>
+            </a:srgbClr>
           </a:solidFill>
           <a:ln/>
         </p:spPr>
       </p:sp>
       <p:sp>
         <p:nvSpPr>
-          <p:cNvPr id="10" name="Text 8"/>
-          <p:cNvSpPr/>
-          <p:nvPr/>
-        </p:nvSpPr>
-        <p:spPr>
-          <a:xfrm>
-            <a:off x="6553048" y="1417320"/>
-            <a:ext cx="4815688" cy="822960"/>
+          <p:cNvPr id="14" name="Text 10"/>
+          <p:cNvSpPr/>
+          <p:nvPr/>
+        </p:nvSpPr>
+        <p:spPr>
+          <a:xfrm>
+            <a:off x="6553048" y="3522269"/>
+            <a:ext cx="4815688" cy="411480"/>
           </a:xfrm>
           <a:prstGeom prst="rect">
             <a:avLst/>
@@ -8142,30 +8330,30 @@
               <a:buNone/>
             </a:pPr>
             <a:r>
-              <a:rPr lang="en-US" sz="1900" b="1" i="1" dirty="0">
-                <a:solidFill>
-                  <a:srgbClr val="000000"/>
-                </a:solidFill>
-                <a:latin typeface="Cambria" pitchFamily="34" charset="0"/>
-                <a:ea typeface="Cambria" pitchFamily="34" charset="-122"/>
-                <a:cs typeface="Cambria" pitchFamily="34" charset="-120"/>
+              <a:rPr lang="en-US" sz="1700" b="1" i="1" dirty="0">
+                <a:solidFill>
+                  <a:srgbClr val="DAFF94"/>
+                </a:solidFill>
+                <a:latin typeface="Libre Baskerville" pitchFamily="34" charset="0"/>
+                <a:ea typeface="Libre Baskerville" pitchFamily="34" charset="-122"/>
+                <a:cs typeface="Libre Baskerville" pitchFamily="34" charset="-120"/>
               </a:rPr>
               <a:t>GERAÇÃO SEM RESSACA</a:t>
             </a:r>
-            <a:endParaRPr lang="en-US" sz="1900" dirty="0"/>
-          </a:p>
-        </p:txBody>
-      </p:sp>
-      <p:sp>
-        <p:nvSpPr>
-          <p:cNvPr id="11" name="Text 9"/>
-          <p:cNvSpPr/>
-          <p:nvPr/>
-        </p:nvSpPr>
-        <p:spPr>
-          <a:xfrm>
-            <a:off x="6553048" y="2377440"/>
-            <a:ext cx="4815688" cy="548640"/>
+            <a:endParaRPr lang="en-US" sz="1700" dirty="0"/>
+          </a:p>
+        </p:txBody>
+      </p:sp>
+      <p:sp>
+        <p:nvSpPr>
+          <p:cNvPr id="15" name="Text 11"/>
+          <p:cNvSpPr/>
+          <p:nvPr/>
+        </p:nvSpPr>
+        <p:spPr>
+          <a:xfrm>
+            <a:off x="6553048" y="3933749"/>
+            <a:ext cx="4815688" cy="320040"/>
           </a:xfrm>
           <a:prstGeom prst="rect">
             <a:avLst/>
@@ -8181,30 +8369,30 @@
               <a:buNone/>
             </a:pPr>
             <a:r>
-              <a:rPr lang="en-US" sz="1200" i="1" dirty="0">
-                <a:solidFill>
-                  <a:srgbClr val="222222"/>
-                </a:solidFill>
-                <a:latin typeface="Cambria" pitchFamily="34" charset="0"/>
-                <a:ea typeface="Cambria" pitchFamily="34" charset="-122"/>
-                <a:cs typeface="Cambria" pitchFamily="34" charset="-120"/>
+              <a:rPr lang="en-US" sz="1050" i="1" dirty="0">
+                <a:solidFill>
+                  <a:srgbClr val="FFFFFF"/>
+                </a:solidFill>
+                <a:latin typeface="Libre Baskerville" pitchFamily="34" charset="0"/>
+                <a:ea typeface="Libre Baskerville" pitchFamily="34" charset="-122"/>
+                <a:cs typeface="Libre Baskerville" pitchFamily="34" charset="-120"/>
               </a:rPr>
               <a:t>Menos álcool, mais intenção no consumo.</a:t>
             </a:r>
-            <a:endParaRPr lang="en-US" sz="1200" dirty="0"/>
-          </a:p>
-        </p:txBody>
-      </p:sp>
-      <p:sp>
-        <p:nvSpPr>
-          <p:cNvPr id="12" name="Text 10"/>
-          <p:cNvSpPr/>
-          <p:nvPr/>
-        </p:nvSpPr>
-        <p:spPr>
-          <a:xfrm>
-            <a:off x="6553048" y="3063240"/>
-            <a:ext cx="4815688" cy="1371600"/>
+            <a:endParaRPr lang="en-US" sz="1050" dirty="0"/>
+          </a:p>
+        </p:txBody>
+      </p:sp>
+      <p:sp>
+        <p:nvSpPr>
+          <p:cNvPr id="16" name="Text 12"/>
+          <p:cNvSpPr/>
+          <p:nvPr/>
+        </p:nvSpPr>
+        <p:spPr>
+          <a:xfrm>
+            <a:off x="6553048" y="4253789"/>
+            <a:ext cx="4815688" cy="777240"/>
           </a:xfrm>
           <a:prstGeom prst="rect">
             <a:avLst/>
@@ -8220,9 +8408,9 @@
               <a:buNone/>
             </a:pPr>
             <a:r>
-              <a:rPr lang="en-US" sz="1150" dirty="0">
-                <a:solidFill>
-                  <a:srgbClr val="222222"/>
+              <a:rPr lang="en-US" sz="1000" dirty="0">
+                <a:solidFill>
+                  <a:srgbClr val="FFFFFF"/>
                 </a:solidFill>
                 <a:latin typeface="Arial" pitchFamily="34" charset="0"/>
                 <a:ea typeface="Arial" pitchFamily="34" charset="-122"/>
@@ -8230,20 +8418,20 @@
               </a:rPr>
               <a:t>64% dos brasileiros declararam não consumir álcool em 2025, contra 55% em 2023.</a:t>
             </a:r>
-            <a:endParaRPr lang="en-US" sz="1150" dirty="0"/>
-          </a:p>
-        </p:txBody>
-      </p:sp>
-      <p:sp>
-        <p:nvSpPr>
-          <p:cNvPr id="13" name="Text 11"/>
-          <p:cNvSpPr/>
-          <p:nvPr/>
-        </p:nvSpPr>
-        <p:spPr>
-          <a:xfrm>
-            <a:off x="6553048" y="4617720"/>
-            <a:ext cx="4815688" cy="320040"/>
+            <a:endParaRPr lang="en-US" sz="1000" dirty="0"/>
+          </a:p>
+        </p:txBody>
+      </p:sp>
+      <p:sp>
+        <p:nvSpPr>
+          <p:cNvPr id="17" name="Text 13"/>
+          <p:cNvSpPr/>
+          <p:nvPr/>
+        </p:nvSpPr>
+        <p:spPr>
+          <a:xfrm>
+            <a:off x="6553048" y="5031029"/>
+            <a:ext cx="4815688" cy="274320"/>
           </a:xfrm>
           <a:prstGeom prst="rect">
             <a:avLst/>
@@ -8259,9 +8447,9 @@
               <a:buNone/>
             </a:pPr>
             <a:r>
-              <a:rPr lang="en-US" sz="1150" b="1" dirty="0">
-                <a:solidFill>
-                  <a:srgbClr val="222222"/>
+              <a:rPr lang="en-US" sz="1000" b="1" dirty="0">
+                <a:solidFill>
+                  <a:srgbClr val="DAFF94"/>
                 </a:solidFill>
                 <a:latin typeface="Arial" pitchFamily="34" charset="0"/>
                 <a:ea typeface="Arial" pitchFamily="34" charset="-122"/>
@@ -8269,20 +8457,20 @@
               </a:rPr>
               <a:t>Para as marcas:</a:t>
             </a:r>
-            <a:endParaRPr lang="en-US" sz="1150" dirty="0"/>
-          </a:p>
-        </p:txBody>
-      </p:sp>
-      <p:sp>
-        <p:nvSpPr>
-          <p:cNvPr id="14" name="Text 12"/>
-          <p:cNvSpPr/>
-          <p:nvPr/>
-        </p:nvSpPr>
-        <p:spPr>
-          <a:xfrm>
-            <a:off x="6553048" y="4983480"/>
-            <a:ext cx="4815688" cy="1234440"/>
+            <a:endParaRPr lang="en-US" sz="1000" dirty="0"/>
+          </a:p>
+        </p:txBody>
+      </p:sp>
+      <p:sp>
+        <p:nvSpPr>
+          <p:cNvPr id="18" name="Text 14"/>
+          <p:cNvSpPr/>
+          <p:nvPr/>
+        </p:nvSpPr>
+        <p:spPr>
+          <a:xfrm>
+            <a:off x="6553048" y="5305349"/>
+            <a:ext cx="4815688" cy="777240"/>
           </a:xfrm>
           <a:prstGeom prst="rect">
             <a:avLst/>
@@ -8298,9 +8486,9 @@
               <a:buNone/>
             </a:pPr>
             <a:r>
-              <a:rPr lang="en-US" sz="1150" dirty="0">
-                <a:solidFill>
-                  <a:srgbClr val="222222"/>
+              <a:rPr lang="en-US" sz="1000" dirty="0">
+                <a:solidFill>
+                  <a:srgbClr val="FFFFFF"/>
                 </a:solidFill>
                 <a:latin typeface="Arial" pitchFamily="34" charset="0"/>
                 <a:ea typeface="Arial" pitchFamily="34" charset="-122"/>
@@ -8308,7 +8496,7 @@
               </a:rPr>
               <a:t>oportunidade de tirar o álcool do centro da experiência sem tirar a experiência do centro.</a:t>
             </a:r>
-            <a:endParaRPr lang="en-US" sz="1150" dirty="0"/>
+            <a:endParaRPr lang="en-US" sz="1000" dirty="0"/>
           </a:p>
         </p:txBody>
       </p:sp>
@@ -10713,9 +10901,9 @@
                 <a:solidFill>
                   <a:srgbClr val="DAFF94"/>
                 </a:solidFill>
-                <a:latin typeface="Courier New" pitchFamily="34" charset="0"/>
-                <a:ea typeface="Courier New" pitchFamily="34" charset="-122"/>
-                <a:cs typeface="Courier New" pitchFamily="34" charset="-120"/>
+                <a:latin typeface="JetBrains Mono" pitchFamily="34" charset="0"/>
+                <a:ea typeface="JetBrains Mono" pitchFamily="34" charset="-122"/>
+                <a:cs typeface="JetBrains Mono" pitchFamily="34" charset="-120"/>
               </a:rPr>
               <a:t>@ARPEJO — O QUE FIZEMOS ESSE MÊS</a:t>
             </a:r>
@@ -10774,9 +10962,9 @@
                 <a:solidFill>
                   <a:srgbClr val="FFFFFF"/>
                 </a:solidFill>
-                <a:latin typeface="Cambria" pitchFamily="34" charset="0"/>
-                <a:ea typeface="Cambria" pitchFamily="34" charset="-122"/>
-                <a:cs typeface="Cambria" pitchFamily="34" charset="-120"/>
+                <a:latin typeface="Libre Baskerville" pitchFamily="34" charset="0"/>
+                <a:ea typeface="Libre Baskerville" pitchFamily="34" charset="-122"/>
+                <a:cs typeface="Libre Baskerville" pitchFamily="34" charset="-120"/>
               </a:rPr>
               <a:t>PagueVeloz — Dia dos Pais</a:t>
             </a:r>
@@ -10835,9 +11023,9 @@
                 <a:solidFill>
                   <a:srgbClr val="DAFF94"/>
                 </a:solidFill>
-                <a:latin typeface="Cambria" pitchFamily="34" charset="0"/>
-                <a:ea typeface="Cambria" pitchFamily="34" charset="-122"/>
-                <a:cs typeface="Cambria" pitchFamily="34" charset="-120"/>
+                <a:latin typeface="Libre Baskerville" pitchFamily="34" charset="0"/>
+                <a:ea typeface="Libre Baskerville" pitchFamily="34" charset="-122"/>
+                <a:cs typeface="Libre Baskerville" pitchFamily="34" charset="-120"/>
               </a:rPr>
               <a:t>Grupo Equatorial — Dia dos Pais</a:t>
             </a:r>
@@ -10906,9 +11094,9 @@
                 <a:solidFill>
                   <a:srgbClr val="DAFF94"/>
                 </a:solidFill>
-                <a:latin typeface="Courier New" pitchFamily="34" charset="0"/>
-                <a:ea typeface="Courier New" pitchFamily="34" charset="-122"/>
-                <a:cs typeface="Courier New" pitchFamily="34" charset="-120"/>
+                <a:latin typeface="JetBrains Mono" pitchFamily="34" charset="0"/>
+                <a:ea typeface="JetBrains Mono" pitchFamily="34" charset="-122"/>
+                <a:cs typeface="JetBrains Mono" pitchFamily="34" charset="-120"/>
               </a:rPr>
               <a:t>INSIGHTS — inspirações do mês (exclusivo clientes)</a:t>
             </a:r>
@@ -10994,9 +11182,9 @@
                 <a:solidFill>
                   <a:srgbClr val="DAFF94"/>
                 </a:solidFill>
-                <a:latin typeface="Cambria" pitchFamily="34" charset="0"/>
-                <a:ea typeface="Cambria" pitchFamily="34" charset="-122"/>
-                <a:cs typeface="Cambria" pitchFamily="34" charset="-120"/>
+                <a:latin typeface="Libre Baskerville" pitchFamily="34" charset="0"/>
+                <a:ea typeface="Libre Baskerville" pitchFamily="34" charset="-122"/>
+                <a:cs typeface="Libre Baskerville" pitchFamily="34" charset="-120"/>
               </a:rPr>
               <a:t>Itaú</a:t>
             </a:r>
@@ -11121,9 +11309,9 @@
                 <a:solidFill>
                   <a:srgbClr val="DAFF94"/>
                 </a:solidFill>
-                <a:latin typeface="Cambria" pitchFamily="34" charset="0"/>
-                <a:ea typeface="Cambria" pitchFamily="34" charset="-122"/>
-                <a:cs typeface="Cambria" pitchFamily="34" charset="-120"/>
+                <a:latin typeface="Libre Baskerville" pitchFamily="34" charset="0"/>
+                <a:ea typeface="Libre Baskerville" pitchFamily="34" charset="-122"/>
+                <a:cs typeface="Libre Baskerville" pitchFamily="34" charset="-120"/>
               </a:rPr>
               <a:t>Coca-Cola</a:t>
             </a:r>
@@ -11248,9 +11436,9 @@
                 <a:solidFill>
                   <a:srgbClr val="DAFF94"/>
                 </a:solidFill>
-                <a:latin typeface="Cambria" pitchFamily="34" charset="0"/>
-                <a:ea typeface="Cambria" pitchFamily="34" charset="-122"/>
-                <a:cs typeface="Cambria" pitchFamily="34" charset="-120"/>
+                <a:latin typeface="Libre Baskerville" pitchFamily="34" charset="0"/>
+                <a:ea typeface="Libre Baskerville" pitchFamily="34" charset="-122"/>
+                <a:cs typeface="Libre Baskerville" pitchFamily="34" charset="-120"/>
               </a:rPr>
               <a:t>Reserva</a:t>
             </a:r>
@@ -11358,9 +11546,9 @@
                 <a:solidFill>
                   <a:srgbClr val="DAFF94"/>
                 </a:solidFill>
-                <a:latin typeface="Courier New" pitchFamily="34" charset="0"/>
-                <a:ea typeface="Courier New" pitchFamily="34" charset="-122"/>
-                <a:cs typeface="Courier New" pitchFamily="34" charset="-120"/>
+                <a:latin typeface="JetBrains Mono" pitchFamily="34" charset="0"/>
+                <a:ea typeface="JetBrains Mono" pitchFamily="34" charset="-122"/>
+                <a:cs typeface="JetBrains Mono" pitchFamily="34" charset="-120"/>
               </a:rPr>
               <a:t>INSIGHTS (continuação)</a:t>
             </a:r>
@@ -11446,9 +11634,9 @@
                 <a:solidFill>
                   <a:srgbClr val="DAFF94"/>
                 </a:solidFill>
-                <a:latin typeface="Cambria" pitchFamily="34" charset="0"/>
-                <a:ea typeface="Cambria" pitchFamily="34" charset="-122"/>
-                <a:cs typeface="Cambria" pitchFamily="34" charset="-120"/>
+                <a:latin typeface="Libre Baskerville" pitchFamily="34" charset="0"/>
+                <a:ea typeface="Libre Baskerville" pitchFamily="34" charset="-122"/>
+                <a:cs typeface="Libre Baskerville" pitchFamily="34" charset="-120"/>
               </a:rPr>
               <a:t>Burger King</a:t>
             </a:r>
@@ -11573,9 +11761,9 @@
                 <a:solidFill>
                   <a:srgbClr val="DAFF94"/>
                 </a:solidFill>
-                <a:latin typeface="Cambria" pitchFamily="34" charset="0"/>
-                <a:ea typeface="Cambria" pitchFamily="34" charset="-122"/>
-                <a:cs typeface="Cambria" pitchFamily="34" charset="-120"/>
+                <a:latin typeface="Libre Baskerville" pitchFamily="34" charset="0"/>
+                <a:ea typeface="Libre Baskerville" pitchFamily="34" charset="-122"/>
+                <a:cs typeface="Libre Baskerville" pitchFamily="34" charset="-120"/>
               </a:rPr>
               <a:t>Chevrolet + iFood</a:t>
             </a:r>
@@ -11700,9 +11888,9 @@
                 <a:solidFill>
                   <a:srgbClr val="DAFF94"/>
                 </a:solidFill>
-                <a:latin typeface="Cambria" pitchFamily="34" charset="0"/>
-                <a:ea typeface="Cambria" pitchFamily="34" charset="-122"/>
-                <a:cs typeface="Cambria" pitchFamily="34" charset="-120"/>
+                <a:latin typeface="Libre Baskerville" pitchFamily="34" charset="0"/>
+                <a:ea typeface="Libre Baskerville" pitchFamily="34" charset="-122"/>
+                <a:cs typeface="Libre Baskerville" pitchFamily="34" charset="-120"/>
               </a:rPr>
               <a:t>Burger King</a:t>
             </a:r>
@@ -11810,9 +11998,9 @@
                 <a:solidFill>
                   <a:srgbClr val="DAFF94"/>
                 </a:solidFill>
-                <a:latin typeface="Courier New" pitchFamily="34" charset="0"/>
-                <a:ea typeface="Courier New" pitchFamily="34" charset="-122"/>
-                <a:cs typeface="Courier New" pitchFamily="34" charset="-120"/>
+                <a:latin typeface="JetBrains Mono" pitchFamily="34" charset="0"/>
+                <a:ea typeface="JetBrains Mono" pitchFamily="34" charset="-122"/>
+                <a:cs typeface="JetBrains Mono" pitchFamily="34" charset="-120"/>
               </a:rPr>
               <a:t>INDICAÇÕES ARPEJERS</a:t>
             </a:r>
@@ -11888,9 +12076,9 @@
                 <a:solidFill>
                   <a:srgbClr val="DAFF94"/>
                 </a:solidFill>
-                <a:latin typeface="Courier New" pitchFamily="34" charset="0"/>
-                <a:ea typeface="Courier New" pitchFamily="34" charset="-122"/>
-                <a:cs typeface="Courier New" pitchFamily="34" charset="-120"/>
+                <a:latin typeface="JetBrains Mono" pitchFamily="34" charset="0"/>
+                <a:ea typeface="JetBrains Mono" pitchFamily="34" charset="-122"/>
+                <a:cs typeface="JetBrains Mono" pitchFamily="34" charset="-120"/>
               </a:rPr>
               <a:t>_ Slow-living como status de luxo</a:t>
             </a:r>
@@ -11927,9 +12115,9 @@
                 <a:solidFill>
                   <a:srgbClr val="DAFF94"/>
                 </a:solidFill>
-                <a:latin typeface="Courier New" pitchFamily="34" charset="0"/>
-                <a:ea typeface="Courier New" pitchFamily="34" charset="-122"/>
-                <a:cs typeface="Courier New" pitchFamily="34" charset="-120"/>
+                <a:latin typeface="JetBrains Mono" pitchFamily="34" charset="0"/>
+                <a:ea typeface="JetBrains Mono" pitchFamily="34" charset="-122"/>
+                <a:cs typeface="JetBrains Mono" pitchFamily="34" charset="-120"/>
               </a:rPr>
               <a:t>_ “O perigo de estar lúcida” — Rosa Monteiro</a:t>
             </a:r>
@@ -13402,9 +13590,9 @@
                 <a:solidFill>
                   <a:srgbClr val="DAFF94"/>
                 </a:solidFill>
-                <a:latin typeface="Cambria" pitchFamily="34" charset="0"/>
-                <a:ea typeface="Cambria" pitchFamily="34" charset="-122"/>
-                <a:cs typeface="Cambria" pitchFamily="34" charset="-120"/>
+                <a:latin typeface="Libre Baskerville" pitchFamily="34" charset="0"/>
+                <a:ea typeface="Libre Baskerville" pitchFamily="34" charset="-122"/>
+                <a:cs typeface="Libre Baskerville" pitchFamily="34" charset="-120"/>
               </a:rPr>
               <a:t>FONTES →</a:t>
             </a:r>

--- a/entregas-agosto26/material-cliente-agosto26.pptx
+++ b/entregas-agosto26/material-cliente-agosto26.pptx
@@ -1,6 +1,6 @@
 
 <file path=ppt/presentation.xml><?xml version="1.0" encoding="utf-8"?>
-<p:presentation xmlns:a="http://schemas.openxmlformats.org/drawingml/2006/main" xmlns:r="http://schemas.openxmlformats.org/officeDocument/2006/relationships" xmlns:p="http://schemas.openxmlformats.org/presentationml/2006/main" saveSubsetFonts="1" autoCompressPictures="0">
+<p:presentation xmlns:a="http://schemas.openxmlformats.org/drawingml/2006/main" xmlns:r="http://schemas.openxmlformats.org/officeDocument/2006/relationships" xmlns:p="http://schemas.openxmlformats.org/presentationml/2006/main" embedTrueTypeFonts="1" saveSubsetFonts="1" autoCompressPictures="0">
   <p:sldMasterIdLst>
     <p:sldMasterId id="2147483648" r:id="rId1"/>
   </p:sldMasterIdLst>
@@ -21,6 +21,36 @@
   </p:notesMasterIdLst>
   <p:sldSz cx="12192000" cy="6858000"/>
   <p:notesSz cx="6858000" cy="12192000"/>
+  <p:embeddedFontLst>
+    <p:embeddedFont>
+      <p:font typeface="JetBrains Mono Medium"/>
+      <p:regular r:id="rId17"/>
+      <p:bold r:id="rId18"/>
+      <p:italic r:id="rId19"/>
+      <p:boldItalic r:id="rId20"/>
+    </p:embeddedFont>
+    <p:embeddedFont>
+      <p:font typeface="Urbanist"/>
+      <p:regular r:id="rId21"/>
+      <p:bold r:id="rId22"/>
+      <p:italic r:id="rId23"/>
+      <p:boldItalic r:id="rId24"/>
+    </p:embeddedFont>
+    <p:embeddedFont>
+      <p:font typeface="Libre Baskerville"/>
+      <p:regular r:id="rId25"/>
+      <p:bold r:id="rId26"/>
+      <p:italic r:id="rId27"/>
+      <p:boldItalic r:id="rId28"/>
+    </p:embeddedFont>
+    <p:embeddedFont>
+      <p:font typeface="Ubuntu Mono"/>
+      <p:regular r:id="rId29"/>
+      <p:bold r:id="rId30"/>
+      <p:italic r:id="rId31"/>
+      <p:boldItalic r:id="rId32"/>
+    </p:embeddedFont>
+  </p:embeddedFontLst>
   <p:defaultTextStyle>
     <a:lvl1pPr marL="0" algn="l" defTabSz="914400" rtl="0" eaLnBrk="1" latinLnBrk="0" hangingPunct="1">
       <a:defRPr sz="1800" kern="1200">

--- a/entregas-agosto26/material-cliente-agosto26.pptx
+++ b/entregas-agosto26/material-cliente-agosto26.pptx
@@ -3998,8 +3998,8 @@
         </p:nvSpPr>
         <p:spPr>
           <a:xfrm>
-            <a:off x="1097280" y="2377440"/>
-            <a:ext cx="4572000" cy="822960"/>
+            <a:off x="548640" y="1280160"/>
+            <a:ext cx="5364328" cy="731520"/>
           </a:xfrm>
           <a:prstGeom prst="ellipse">
             <a:avLst/>
@@ -4020,8 +4020,8 @@
         </p:nvSpPr>
         <p:spPr>
           <a:xfrm>
-            <a:off x="1097280" y="2377440"/>
-            <a:ext cx="4572000" cy="822960"/>
+            <a:off x="548640" y="1280160"/>
+            <a:ext cx="5364328" cy="731520"/>
           </a:xfrm>
           <a:prstGeom prst="rect">
             <a:avLst/>
@@ -4037,7 +4037,7 @@
               <a:buNone/>
             </a:pPr>
             <a:r>
-              <a:rPr lang="en-US" sz="1600" i="1" dirty="0">
+              <a:rPr lang="en-US" sz="1500" i="1" dirty="0">
                 <a:solidFill>
                   <a:srgbClr val="FFFFFF"/>
                 </a:solidFill>
@@ -4047,7 +4047,7 @@
               </a:rPr>
               <a:t>PagueVeloz — Dia dos Pais</a:t>
             </a:r>
-            <a:endParaRPr lang="en-US" sz="1600" dirty="0"/>
+            <a:endParaRPr lang="en-US" sz="1500" dirty="0"/>
           </a:p>
         </p:txBody>
       </p:sp>
@@ -4067,8 +4067,8 @@
         </p:blipFill>
         <p:spPr>
           <a:xfrm>
-            <a:off x="5427330" y="2616098"/>
-            <a:ext cx="345643" cy="345643"/>
+            <a:off x="5697901" y="1492301"/>
+            <a:ext cx="307238" cy="307238"/>
           </a:xfrm>
           <a:prstGeom prst="rect">
             <a:avLst/>
@@ -4077,14 +4077,101 @@
       </p:pic>
       <p:sp>
         <p:nvSpPr>
-          <p:cNvPr id="7" name="Shape 3"/>
-          <p:cNvSpPr/>
-          <p:nvPr/>
-        </p:nvSpPr>
-        <p:spPr>
-          <a:xfrm>
-            <a:off x="6400800" y="3657600"/>
-            <a:ext cx="4754880" cy="822960"/>
+          <p:cNvPr id="7" name="Text 3"/>
+          <p:cNvSpPr/>
+          <p:nvPr/>
+        </p:nvSpPr>
+        <p:spPr>
+          <a:xfrm>
+            <a:off x="548640" y="2286000"/>
+            <a:ext cx="5364328" cy="2103120"/>
+          </a:xfrm>
+          <a:prstGeom prst="rect">
+            <a:avLst/>
+          </a:prstGeom>
+          <a:noFill/>
+          <a:ln/>
+        </p:spPr>
+        <p:txBody>
+          <a:bodyPr wrap="square" lIns="0" tIns="0" rIns="0" bIns="0" rtlCol="0" anchor="ctr"/>
+          <a:lstStyle/>
+          <a:p>
+            <a:pPr indent="0" marL="0">
+              <a:buNone/>
+            </a:pPr>
+            <a:r>
+              <a:rPr lang="en-US" sz="1250" dirty="0">
+                <a:solidFill>
+                  <a:srgbClr val="FFFFFF"/>
+                </a:solidFill>
+                <a:latin typeface="Arial" pitchFamily="34" charset="0"/>
+                <a:ea typeface="Arial" pitchFamily="34" charset="-122"/>
+                <a:cs typeface="Arial" pitchFamily="34" charset="-120"/>
+              </a:rPr>
+              <a:t>“O nome por trás do meu nome”: fachadas de comércio em São Paulo e Campinas viram homenagens aos pais que apoiaram o sonho de três empreendedores. Desdobra em pílulas de conteúdo dinâmico nas redes.</a:t>
+            </a:r>
+            <a:endParaRPr lang="en-US" sz="1250" dirty="0"/>
+          </a:p>
+        </p:txBody>
+      </p:sp>
+      <p:sp>
+        <p:nvSpPr>
+          <p:cNvPr id="8" name="Text 4">
+            <a:hlinkClick r:id="rId3" tooltip=""/>
+          </p:cNvPr>
+          <p:cNvSpPr/>
+          <p:nvPr/>
+        </p:nvSpPr>
+        <p:spPr>
+          <a:xfrm>
+            <a:off x="548640" y="4572000"/>
+            <a:ext cx="5364328" cy="365760"/>
+          </a:xfrm>
+          <a:prstGeom prst="rect">
+            <a:avLst/>
+          </a:prstGeom>
+          <a:noFill/>
+          <a:ln/>
+        </p:spPr>
+        <p:txBody>
+          <a:bodyPr wrap="square" lIns="0" tIns="0" rIns="0" bIns="0" rtlCol="0" anchor="ctr"/>
+          <a:lstStyle/>
+          <a:p>
+            <a:pPr indent="0" marL="0">
+              <a:buNone/>
+            </a:pPr>
+            <a:r>
+              <a:rPr lang="en-US" sz="1200" b="1" u="sng" dirty="0">
+                <a:solidFill>
+                  <a:srgbClr val="FFFFFF"/>
+                </a:solidFill>
+                <a:latin typeface="JetBrains Mono" pitchFamily="34" charset="0"/>
+                <a:ea typeface="JetBrains Mono" pitchFamily="34" charset="-122"/>
+                <a:cs typeface="JetBrains Mono" pitchFamily="34" charset="-120"/>
+                <a:hlinkClick r:id="rId3" invalidUrl="" action="" tgtFrame="" tooltip="" history="1" highlightClick="0" endSnd="0">
+                  <a:extLst>
+                    <a:ext uri="{A12FA001-AC4F-418D-AE19-62706E023703}">
+                      <ahyp:hlinkClr xmlns:ahyp="http://schemas.microsoft.com/office/drawing/2018/hyperlinkcolor" val="tx"/>
+                    </a:ext>
+                  </a:extLst>
+                </a:hlinkClick>
+              </a:rPr>
+              <a:t>▶ assistir ao case</a:t>
+            </a:r>
+            <a:endParaRPr lang="en-US" sz="1200" dirty="0"/>
+          </a:p>
+        </p:txBody>
+      </p:sp>
+      <p:sp>
+        <p:nvSpPr>
+          <p:cNvPr id="9" name="Shape 5"/>
+          <p:cNvSpPr/>
+          <p:nvPr/>
+        </p:nvSpPr>
+        <p:spPr>
+          <a:xfrm>
+            <a:off x="6278728" y="1280160"/>
+            <a:ext cx="5364328" cy="731520"/>
           </a:xfrm>
           <a:prstGeom prst="ellipse">
             <a:avLst/>
@@ -4099,14 +4186,14 @@
       </p:sp>
       <p:sp>
         <p:nvSpPr>
-          <p:cNvPr id="8" name="Text 4"/>
-          <p:cNvSpPr/>
-          <p:nvPr/>
-        </p:nvSpPr>
-        <p:spPr>
-          <a:xfrm>
-            <a:off x="6400800" y="3657600"/>
-            <a:ext cx="4754880" cy="822960"/>
+          <p:cNvPr id="10" name="Text 6"/>
+          <p:cNvSpPr/>
+          <p:nvPr/>
+        </p:nvSpPr>
+        <p:spPr>
+          <a:xfrm>
+            <a:off x="6278728" y="1280160"/>
+            <a:ext cx="5364328" cy="731520"/>
           </a:xfrm>
           <a:prstGeom prst="rect">
             <a:avLst/>
@@ -4122,7 +4209,7 @@
               <a:buNone/>
             </a:pPr>
             <a:r>
-              <a:rPr lang="en-US" sz="1600" i="1" dirty="0">
+              <a:rPr lang="en-US" sz="1500" i="1" dirty="0">
                 <a:solidFill>
                   <a:srgbClr val="DAFF94"/>
                 </a:solidFill>
@@ -4132,34 +4219,121 @@
               </a:rPr>
               <a:t>Grupo Equatorial — Dia dos Pais</a:t>
             </a:r>
-            <a:endParaRPr lang="en-US" sz="1600" dirty="0"/>
+            <a:endParaRPr lang="en-US" sz="1500" dirty="0"/>
           </a:p>
         </p:txBody>
       </p:sp>
       <p:pic>
         <p:nvPicPr>
-          <p:cNvPr id="9" name="Image 2" descr="/home/user/data-manipulation-exercises/.claude/skills/brand-guidelines/assets/textures/globe-lime.png">    </p:cNvPr>
+          <p:cNvPr id="11" name="Image 2" descr="/home/user/data-manipulation-exercises/.claude/skills/brand-guidelines/assets/textures/globe-lime.png">    </p:cNvPr>
           <p:cNvPicPr>
             <a:picLocks noChangeAspect="1"/>
           </p:cNvPicPr>
           <p:nvPr/>
         </p:nvPicPr>
         <p:blipFill>
-          <a:blip r:embed="rId3"/>
+          <a:blip r:embed="rId4"/>
           <a:stretch>
             <a:fillRect/>
           </a:stretch>
         </p:blipFill>
         <p:spPr>
           <a:xfrm>
-            <a:off x="10913730" y="3896258"/>
-            <a:ext cx="345643" cy="345643"/>
+            <a:off x="11427988" y="1492301"/>
+            <a:ext cx="307238" cy="307238"/>
           </a:xfrm>
           <a:prstGeom prst="rect">
             <a:avLst/>
           </a:prstGeom>
         </p:spPr>
       </p:pic>
+      <p:sp>
+        <p:nvSpPr>
+          <p:cNvPr id="12" name="Text 7"/>
+          <p:cNvSpPr/>
+          <p:nvPr/>
+        </p:nvSpPr>
+        <p:spPr>
+          <a:xfrm>
+            <a:off x="6278728" y="2286000"/>
+            <a:ext cx="5364328" cy="2103120"/>
+          </a:xfrm>
+          <a:prstGeom prst="rect">
+            <a:avLst/>
+          </a:prstGeom>
+          <a:noFill/>
+          <a:ln/>
+        </p:spPr>
+        <p:txBody>
+          <a:bodyPr wrap="square" lIns="0" tIns="0" rIns="0" bIns="0" rtlCol="0" anchor="ctr"/>
+          <a:lstStyle/>
+          <a:p>
+            <a:pPr indent="0" marL="0">
+              <a:buNone/>
+            </a:pPr>
+            <a:r>
+              <a:rPr lang="en-US" sz="1250" dirty="0">
+                <a:solidFill>
+                  <a:srgbClr val="FFFFFF"/>
+                </a:solidFill>
+                <a:latin typeface="Arial" pitchFamily="34" charset="0"/>
+                <a:ea typeface="Arial" pitchFamily="34" charset="-122"/>
+                <a:cs typeface="Arial" pitchFamily="34" charset="-120"/>
+              </a:rPr>
+              <a:t>Espelhos apagados em locais de grande circulação: um entrevistador pergunta em que a pessoa se parece com o pai — não fisicamente. Ao terminar de contar, uma palavra se acende no reflexo.</a:t>
+            </a:r>
+            <a:endParaRPr lang="en-US" sz="1250" dirty="0"/>
+          </a:p>
+        </p:txBody>
+      </p:sp>
+      <p:sp>
+        <p:nvSpPr>
+          <p:cNvPr id="13" name="Text 8">
+            <a:hlinkClick r:id="rId5" tooltip=""/>
+          </p:cNvPr>
+          <p:cNvSpPr/>
+          <p:nvPr/>
+        </p:nvSpPr>
+        <p:spPr>
+          <a:xfrm>
+            <a:off x="6278728" y="4572000"/>
+            <a:ext cx="5364328" cy="365760"/>
+          </a:xfrm>
+          <a:prstGeom prst="rect">
+            <a:avLst/>
+          </a:prstGeom>
+          <a:noFill/>
+          <a:ln/>
+        </p:spPr>
+        <p:txBody>
+          <a:bodyPr wrap="square" lIns="0" tIns="0" rIns="0" bIns="0" rtlCol="0" anchor="ctr"/>
+          <a:lstStyle/>
+          <a:p>
+            <a:pPr indent="0" marL="0">
+              <a:buNone/>
+            </a:pPr>
+            <a:r>
+              <a:rPr lang="en-US" sz="1200" b="1" u="sng" dirty="0">
+                <a:solidFill>
+                  <a:srgbClr val="DAFF94"/>
+                </a:solidFill>
+                <a:latin typeface="JetBrains Mono" pitchFamily="34" charset="0"/>
+                <a:ea typeface="JetBrains Mono" pitchFamily="34" charset="-122"/>
+                <a:cs typeface="JetBrains Mono" pitchFamily="34" charset="-120"/>
+                <a:hlinkClick r:id="rId5" invalidUrl="" action="" tgtFrame="" tooltip="" history="1" highlightClick="0" endSnd="0">
+                  <a:extLst>
+                    <a:ext uri="{A12FA001-AC4F-418D-AE19-62706E023703}">
+                      <ahyp:hlinkClr xmlns:ahyp="http://schemas.microsoft.com/office/drawing/2018/hyperlinkcolor" val="tx"/>
+                    </a:ext>
+                  </a:extLst>
+                </a:hlinkClick>
+              </a:rPr>
+              <a:t>▶ assistir ao case</a:t>
+            </a:r>
+            <a:endParaRPr lang="en-US" sz="1200" dirty="0"/>
+          </a:p>
+        </p:txBody>
+      </p:sp>
     </p:spTree>
   </p:cSld>
   <p:clrMapOvr>

--- a/entregas-agosto26/material-cliente-agosto26.pptx
+++ b/entregas-agosto26/material-cliente-agosto26.pptx
@@ -3034,7 +3034,7 @@
       </p:sp>
       <p:pic>
         <p:nvPicPr>
-          <p:cNvPr id="11" name="Image 1" descr="/tmp/claude-0/-home-user-data-manipulation-exercises/f19acac8-ccb4-5197-8e49-c3b6029ad477/scratchpad/report-images/final/trend-experiencias-transformadoras.jpg">    </p:cNvPr>
+          <p:cNvPr id="11" name="Image 1" descr="/tmp/claude-0/-home-user-data-manipulation-exercises/f19acac8-ccb4-5197-8e49-c3b6029ad477/scratchpad/report-images/final/client-experiencias-transformadoras.jpg">    </p:cNvPr>
           <p:cNvPicPr>
             <a:picLocks noChangeAspect="1"/>
           </p:cNvPicPr>
@@ -3633,7 +3633,7 @@
       </p:sp>
       <p:pic>
         <p:nvPicPr>
-          <p:cNvPr id="11" name="Image 1" descr="/tmp/claude-0/-home-user-data-manipulation-exercises/f19acac8-ccb4-5197-8e49-c3b6029ad477/scratchpad/report-images/final/trend-sem-ressaca.jpg">    </p:cNvPr>
+          <p:cNvPr id="11" name="Image 1" descr="/tmp/claude-0/-home-user-data-manipulation-exercises/f19acac8-ccb4-5197-8e49-c3b6029ad477/scratchpad/report-images/final/client-sem-ressaca.jpg">    </p:cNvPr>
           <p:cNvPicPr>
             <a:picLocks noChangeAspect="1"/>
           </p:cNvPicPr>

--- a/entregas-agosto26/material-cliente-agosto26.pptx
+++ b/entregas-agosto26/material-cliente-agosto26.pptx
@@ -1708,7 +1708,7 @@
       </p:grpSpPr>
       <p:pic>
         <p:nvPicPr>
-          <p:cNvPr id="2" name="Image 0" descr="/home/user/data-manipulation-exercises/.claude/skills/brand-guidelines/assets/textures/plus-grid-on-black.png">    </p:cNvPr>
+          <p:cNvPr id="2" name="Image 0" descr="/tmp/claude-0/-home-user-data-manipulation-exercises/f19acac8-ccb4-5197-8e49-c3b6029ad477/scratchpad/texture-check/assets/plus-grid-on-black.png">    </p:cNvPr>
           <p:cNvPicPr>
             <a:picLocks noChangeAspect="1"/>
           </p:cNvPicPr>
@@ -1732,7 +1732,7 @@
       </p:pic>
       <p:pic>
         <p:nvPicPr>
-          <p:cNvPr id="3" name="Image 1" descr="/home/user/data-manipulation-exercises/.claude/skills/brand-guidelines/assets/textures/arrow-lime.png">    </p:cNvPr>
+          <p:cNvPr id="3" name="Image 1" descr="/tmp/claude-0/-home-user-data-manipulation-exercises/f19acac8-ccb4-5197-8e49-c3b6029ad477/scratchpad/texture-check/assets/arrow-lime.png">    </p:cNvPr>
           <p:cNvPicPr>
             <a:picLocks noChangeAspect="1"/>
           </p:cNvPicPr>
@@ -1756,7 +1756,7 @@
       </p:pic>
       <p:pic>
         <p:nvPicPr>
-          <p:cNvPr id="4" name="Image 2" descr="/home/user/data-manipulation-exercises/.claude/skills/brand-guidelines/assets/textures/arrow-lime.png">    </p:cNvPr>
+          <p:cNvPr id="4" name="Image 2" descr="/tmp/claude-0/-home-user-data-manipulation-exercises/f19acac8-ccb4-5197-8e49-c3b6029ad477/scratchpad/texture-check/assets/arrow-lime.png">    </p:cNvPr>
           <p:cNvPicPr>
             <a:picLocks noChangeAspect="1"/>
           </p:cNvPicPr>
@@ -1780,7 +1780,7 @@
       </p:pic>
       <p:pic>
         <p:nvPicPr>
-          <p:cNvPr id="5" name="Image 3" descr="/home/user/data-manipulation-exercises/.claude/skills/brand-guidelines/assets/textures/arrow-lime.png">    </p:cNvPr>
+          <p:cNvPr id="5" name="Image 3" descr="/tmp/claude-0/-home-user-data-manipulation-exercises/f19acac8-ccb4-5197-8e49-c3b6029ad477/scratchpad/texture-check/assets/arrow-lime.png">    </p:cNvPr>
           <p:cNvPicPr>
             <a:picLocks noChangeAspect="1"/>
           </p:cNvPicPr>
@@ -1804,7 +1804,7 @@
       </p:pic>
       <p:pic>
         <p:nvPicPr>
-          <p:cNvPr id="6" name="Image 4" descr="/home/user/data-manipulation-exercises/.claude/skills/brand-guidelines/assets/textures/arrow-lime.png">    </p:cNvPr>
+          <p:cNvPr id="6" name="Image 4" descr="/tmp/claude-0/-home-user-data-manipulation-exercises/f19acac8-ccb4-5197-8e49-c3b6029ad477/scratchpad/texture-check/assets/arrow-lime.png">    </p:cNvPr>
           <p:cNvPicPr>
             <a:picLocks noChangeAspect="1"/>
           </p:cNvPicPr>
@@ -1962,7 +1962,7 @@
       </p:grpSpPr>
       <p:pic>
         <p:nvPicPr>
-          <p:cNvPr id="2" name="Image 0" descr="/home/user/data-manipulation-exercises/.claude/skills/brand-guidelines/assets/textures/plus-grid-on-black.png">    </p:cNvPr>
+          <p:cNvPr id="2" name="Image 0" descr="/tmp/claude-0/-home-user-data-manipulation-exercises/f19acac8-ccb4-5197-8e49-c3b6029ad477/scratchpad/texture-check/assets/plus-grid-on-black.png">    </p:cNvPr>
           <p:cNvPicPr>
             <a:picLocks noChangeAspect="1"/>
           </p:cNvPicPr>
@@ -2320,7 +2320,7 @@
       </p:sp>
       <p:pic>
         <p:nvPicPr>
-          <p:cNvPr id="9" name="Image 0" descr="/home/user/data-manipulation-exercises/.claude/skills/brand-guidelines/assets/textures/globe-lime.png">    </p:cNvPr>
+          <p:cNvPr id="9" name="Image 0" descr="/tmp/claude-0/-home-user-data-manipulation-exercises/f19acac8-ccb4-5197-8e49-c3b6029ad477/scratchpad/texture-check/assets/globe-lime.png">    </p:cNvPr>
           <p:cNvPicPr>
             <a:picLocks noChangeAspect="1"/>
           </p:cNvPicPr>
@@ -2466,7 +2466,7 @@
       </p:sp>
       <p:pic>
         <p:nvPicPr>
-          <p:cNvPr id="14" name="Image 1" descr="/home/user/data-manipulation-exercises/.claude/skills/brand-guidelines/assets/textures/globe-lime.png">    </p:cNvPr>
+          <p:cNvPr id="14" name="Image 1" descr="/tmp/claude-0/-home-user-data-manipulation-exercises/f19acac8-ccb4-5197-8e49-c3b6029ad477/scratchpad/texture-check/assets/globe-lime.png">    </p:cNvPr>
           <p:cNvPicPr>
             <a:picLocks noChangeAspect="1"/>
           </p:cNvPicPr>
@@ -2612,7 +2612,7 @@
       </p:sp>
       <p:pic>
         <p:nvPicPr>
-          <p:cNvPr id="19" name="Image 2" descr="/home/user/data-manipulation-exercises/.claude/skills/brand-guidelines/assets/textures/globe-lime.png">    </p:cNvPr>
+          <p:cNvPr id="19" name="Image 2" descr="/tmp/claude-0/-home-user-data-manipulation-exercises/f19acac8-ccb4-5197-8e49-c3b6029ad477/scratchpad/texture-check/assets/globe-lime.png">    </p:cNvPr>
           <p:cNvPicPr>
             <a:picLocks noChangeAspect="1"/>
           </p:cNvPicPr>
@@ -2675,7 +2675,7 @@
       </p:sp>
       <p:pic>
         <p:nvPicPr>
-          <p:cNvPr id="21" name="Image 3" descr="/home/user/data-manipulation-exercises/.claude/skills/brand-guidelines/assets/textures/arrow-black.png">    </p:cNvPr>
+          <p:cNvPr id="21" name="Image 3" descr="/tmp/claude-0/-home-user-data-manipulation-exercises/f19acac8-ccb4-5197-8e49-c3b6029ad477/scratchpad/texture-check/assets/arrow-black.png">    </p:cNvPr>
           <p:cNvPicPr>
             <a:picLocks noChangeAspect="1"/>
           </p:cNvPicPr>
@@ -2778,7 +2778,7 @@
         </p:nvPicPr>
         <p:blipFill>
           <a:blip r:embed="rId1"/>
-          <a:srcRect l="0" r="0" t="0" b="0"/>
+          <a:srcRect l="10" r="10" t="0" b="0"/>
           <a:stretch/>
         </p:blipFill>
         <p:spPr>
@@ -3042,7 +3042,7 @@
         </p:nvPicPr>
         <p:blipFill>
           <a:blip r:embed="rId2"/>
-          <a:srcRect l="0" r="0" t="0" b="0"/>
+          <a:srcRect l="10" r="10" t="0" b="0"/>
           <a:stretch/>
         </p:blipFill>
         <p:spPr>
@@ -3377,7 +3377,7 @@
         </p:nvPicPr>
         <p:blipFill>
           <a:blip r:embed="rId1"/>
-          <a:srcRect l="0" r="0" t="0" b="0"/>
+          <a:srcRect l="10" r="10" t="0" b="0"/>
           <a:stretch/>
         </p:blipFill>
         <p:spPr>
@@ -3641,7 +3641,7 @@
         </p:nvPicPr>
         <p:blipFill>
           <a:blip r:embed="rId2"/>
-          <a:srcRect l="0" r="0" t="0" b="0"/>
+          <a:srcRect l="10" r="10" t="0" b="0"/>
           <a:stretch/>
         </p:blipFill>
         <p:spPr>
@@ -3929,7 +3929,7 @@
       </p:grpSpPr>
       <p:pic>
         <p:nvPicPr>
-          <p:cNvPr id="2" name="Image 0" descr="/home/user/data-manipulation-exercises/.claude/skills/brand-guidelines/assets/textures/plus-grid-on-black.png">    </p:cNvPr>
+          <p:cNvPr id="2" name="Image 0" descr="/tmp/claude-0/-home-user-data-manipulation-exercises/f19acac8-ccb4-5197-8e49-c3b6029ad477/scratchpad/texture-check/assets/plus-grid-on-black.png">    </p:cNvPr>
           <p:cNvPicPr>
             <a:picLocks noChangeAspect="1"/>
           </p:cNvPicPr>
@@ -4053,7 +4053,7 @@
       </p:sp>
       <p:pic>
         <p:nvPicPr>
-          <p:cNvPr id="6" name="Image 1" descr="/home/user/data-manipulation-exercises/.claude/skills/brand-guidelines/assets/textures/globe-white.png">    </p:cNvPr>
+          <p:cNvPr id="6" name="Image 1" descr="/tmp/claude-0/-home-user-data-manipulation-exercises/f19acac8-ccb4-5197-8e49-c3b6029ad477/scratchpad/texture-check/assets/globe-white.png">    </p:cNvPr>
           <p:cNvPicPr>
             <a:picLocks noChangeAspect="1"/>
           </p:cNvPicPr>
@@ -4225,7 +4225,7 @@
       </p:sp>
       <p:pic>
         <p:nvPicPr>
-          <p:cNvPr id="11" name="Image 2" descr="/home/user/data-manipulation-exercises/.claude/skills/brand-guidelines/assets/textures/globe-lime.png">    </p:cNvPr>
+          <p:cNvPr id="11" name="Image 2" descr="/tmp/claude-0/-home-user-data-manipulation-exercises/f19acac8-ccb4-5197-8e49-c3b6029ad477/scratchpad/texture-check/assets/globe-lime.png">    </p:cNvPr>
           <p:cNvPicPr>
             <a:picLocks noChangeAspect="1"/>
           </p:cNvPicPr>
@@ -4495,7 +4495,7 @@
       </p:sp>
       <p:pic>
         <p:nvPicPr>
-          <p:cNvPr id="6" name="Image 0" descr="/home/user/data-manipulation-exercises/.claude/skills/brand-guidelines/assets/textures/globe-lime.png">    </p:cNvPr>
+          <p:cNvPr id="6" name="Image 0" descr="/tmp/claude-0/-home-user-data-manipulation-exercises/f19acac8-ccb4-5197-8e49-c3b6029ad477/scratchpad/texture-check/assets/globe-lime.png">    </p:cNvPr>
           <p:cNvPicPr>
             <a:picLocks noChangeAspect="1"/>
           </p:cNvPicPr>
@@ -4646,7 +4646,7 @@
       </p:sp>
       <p:pic>
         <p:nvPicPr>
-          <p:cNvPr id="11" name="Image 1" descr="/home/user/data-manipulation-exercises/.claude/skills/brand-guidelines/assets/textures/globe-lime.png">    </p:cNvPr>
+          <p:cNvPr id="11" name="Image 1" descr="/tmp/claude-0/-home-user-data-manipulation-exercises/f19acac8-ccb4-5197-8e49-c3b6029ad477/scratchpad/texture-check/assets/globe-lime.png">    </p:cNvPr>
           <p:cNvPicPr>
             <a:picLocks noChangeAspect="1"/>
           </p:cNvPicPr>
@@ -4797,7 +4797,7 @@
       </p:sp>
       <p:pic>
         <p:nvPicPr>
-          <p:cNvPr id="16" name="Image 2" descr="/home/user/data-manipulation-exercises/.claude/skills/brand-guidelines/assets/textures/globe-lime.png">    </p:cNvPr>
+          <p:cNvPr id="16" name="Image 2" descr="/tmp/claude-0/-home-user-data-manipulation-exercises/f19acac8-ccb4-5197-8e49-c3b6029ad477/scratchpad/texture-check/assets/globe-lime.png">    </p:cNvPr>
           <p:cNvPicPr>
             <a:picLocks noChangeAspect="1"/>
           </p:cNvPicPr>
@@ -5019,7 +5019,7 @@
       </p:sp>
       <p:pic>
         <p:nvPicPr>
-          <p:cNvPr id="6" name="Image 0" descr="/home/user/data-manipulation-exercises/.claude/skills/brand-guidelines/assets/textures/globe-lime.png">    </p:cNvPr>
+          <p:cNvPr id="6" name="Image 0" descr="/tmp/claude-0/-home-user-data-manipulation-exercises/f19acac8-ccb4-5197-8e49-c3b6029ad477/scratchpad/texture-check/assets/globe-lime.png">    </p:cNvPr>
           <p:cNvPicPr>
             <a:picLocks noChangeAspect="1"/>
           </p:cNvPicPr>
@@ -5170,7 +5170,7 @@
       </p:sp>
       <p:pic>
         <p:nvPicPr>
-          <p:cNvPr id="11" name="Image 1" descr="/home/user/data-manipulation-exercises/.claude/skills/brand-guidelines/assets/textures/globe-lime.png">    </p:cNvPr>
+          <p:cNvPr id="11" name="Image 1" descr="/tmp/claude-0/-home-user-data-manipulation-exercises/f19acac8-ccb4-5197-8e49-c3b6029ad477/scratchpad/texture-check/assets/globe-lime.png">    </p:cNvPr>
           <p:cNvPicPr>
             <a:picLocks noChangeAspect="1"/>
           </p:cNvPicPr>
@@ -5321,7 +5321,7 @@
       </p:sp>
       <p:pic>
         <p:nvPicPr>
-          <p:cNvPr id="16" name="Image 2" descr="/home/user/data-manipulation-exercises/.claude/skills/brand-guidelines/assets/textures/globe-lime.png">    </p:cNvPr>
+          <p:cNvPr id="16" name="Image 2" descr="/tmp/claude-0/-home-user-data-manipulation-exercises/f19acac8-ccb4-5197-8e49-c3b6029ad477/scratchpad/texture-check/assets/globe-lime.png">    </p:cNvPr>
           <p:cNvPicPr>
             <a:picLocks noChangeAspect="1"/>
           </p:cNvPicPr>
@@ -5604,7 +5604,7 @@
       </p:grpSpPr>
       <p:pic>
         <p:nvPicPr>
-          <p:cNvPr id="2" name="Image 0" descr="/home/user/data-manipulation-exercises/.claude/skills/brand-guidelines/assets/textures/plus-grid-on-black.png">    </p:cNvPr>
+          <p:cNvPr id="2" name="Image 0" descr="/tmp/claude-0/-home-user-data-manipulation-exercises/f19acac8-ccb4-5197-8e49-c3b6029ad477/scratchpad/texture-check/assets/plus-grid-on-black.png">    </p:cNvPr>
           <p:cNvPicPr>
             <a:picLocks noChangeAspect="1"/>
           </p:cNvPicPr>

--- a/entregas-agosto26/material-cliente-agosto26.pptx
+++ b/entregas-agosto26/material-cliente-agosto26.pptx
@@ -2786,8 +2786,10 @@
             <a:off x="548640" y="1188720"/>
             <a:ext cx="5364328" cy="5120640"/>
           </a:xfrm>
-          <a:prstGeom prst="rect">
-            <a:avLst/>
+          <a:prstGeom prst="roundRect">
+            <a:avLst>
+              <a:gd name="adj" fmla="val 2679"/>
+            </a:avLst>
           </a:prstGeom>
         </p:spPr>
       </p:pic>
@@ -3050,8 +3052,10 @@
             <a:off x="6278728" y="1188720"/>
             <a:ext cx="5364328" cy="5120640"/>
           </a:xfrm>
-          <a:prstGeom prst="rect">
-            <a:avLst/>
+          <a:prstGeom prst="roundRect">
+            <a:avLst>
+              <a:gd name="adj" fmla="val 2679"/>
+            </a:avLst>
           </a:prstGeom>
         </p:spPr>
       </p:pic>
@@ -3385,8 +3389,10 @@
             <a:off x="548640" y="1188720"/>
             <a:ext cx="5364328" cy="5120640"/>
           </a:xfrm>
-          <a:prstGeom prst="rect">
-            <a:avLst/>
+          <a:prstGeom prst="roundRect">
+            <a:avLst>
+              <a:gd name="adj" fmla="val 2679"/>
+            </a:avLst>
           </a:prstGeom>
         </p:spPr>
       </p:pic>
@@ -3649,8 +3655,10 @@
             <a:off x="6278728" y="1188720"/>
             <a:ext cx="5364328" cy="5120640"/>
           </a:xfrm>
-          <a:prstGeom prst="rect">
-            <a:avLst/>
+          <a:prstGeom prst="roundRect">
+            <a:avLst>
+              <a:gd name="adj" fmla="val 2679"/>
+            </a:avLst>
           </a:prstGeom>
         </p:spPr>
       </p:pic>
